--- a/정치성_DAI_AI헬스케어플랫폼팀장_면접PT.pptx
+++ b/정치성_DAI_AI헬스케어플랫폼팀장_면접PT.pptx
@@ -14,6 +14,7 @@
     <p:sldId id="262" r:id="rId13"/>
     <p:sldId id="263" r:id="rId14"/>
     <p:sldId id="264" r:id="rId15"/>
+    <p:sldId id="265" r:id="rId16"/>
   </p:sldIdLst>
   <p:sldSz cx="12191695" cy="6858000" type="screen4x3"/>
   <p:notesSz cx="6858000" cy="9144000"/>
@@ -3608,7 +3609,782 @@
                 <a:latin typeface="맑은 고딕"/>
                 <a:ea typeface="맑은 고딕"/>
               </a:rPr>
-              <a:t>01 / 09</a:t>
+              <a:t>01 / 10</a:t>
+            </a:r>
+          </a:p>
+        </p:txBody>
+      </p:sp>
+    </p:spTree>
+  </p:cSld>
+  <p:clrMapOvr>
+    <a:masterClrMapping/>
+  </p:clrMapOvr>
+</p:sld>
+</file>
+
+<file path=ppt/slides/slide10.xml><?xml version="1.0" encoding="utf-8"?>
+<p:sld xmlns:a="http://schemas.openxmlformats.org/drawingml/2006/main" xmlns:p="http://schemas.openxmlformats.org/presentationml/2006/main" xmlns:r="http://schemas.openxmlformats.org/officeDocument/2006/relationships">
+  <p:cSld>
+    <p:spTree>
+      <p:nvGrpSpPr>
+        <p:cNvPr id="1" name=""/>
+        <p:cNvGrpSpPr/>
+        <p:nvPr/>
+      </p:nvGrpSpPr>
+      <p:grpSpPr/>
+      <p:sp>
+        <p:nvSpPr>
+          <p:cNvPr id="2" name="Rectangle 1"/>
+          <p:cNvSpPr/>
+          <p:nvPr/>
+        </p:nvSpPr>
+        <p:spPr>
+          <a:xfrm>
+            <a:off x="0" y="0"/>
+            <a:ext cx="12191695" cy="6858000"/>
+          </a:xfrm>
+          <a:prstGeom prst="rect">
+            <a:avLst/>
+          </a:prstGeom>
+          <a:solidFill>
+            <a:srgbClr val="141A33"/>
+          </a:solidFill>
+          <a:ln>
+            <a:noFill/>
+          </a:ln>
+          <a:effectLst/>
+        </p:spPr>
+        <p:style>
+          <a:lnRef idx="1">
+            <a:schemeClr val="accent1"/>
+          </a:lnRef>
+          <a:fillRef idx="3">
+            <a:schemeClr val="accent1"/>
+          </a:fillRef>
+          <a:effectRef idx="2">
+            <a:schemeClr val="accent1"/>
+          </a:effectRef>
+          <a:fontRef idx="minor">
+            <a:schemeClr val="lt1"/>
+          </a:fontRef>
+        </p:style>
+        <p:txBody>
+          <a:bodyPr rtlCol="0" anchor="ctr"/>
+          <a:lstStyle/>
+          <a:p>
+            <a:pPr algn="ctr"/>
+          </a:p>
+        </p:txBody>
+      </p:sp>
+      <p:sp>
+        <p:nvSpPr>
+          <p:cNvPr id="3" name="TextBox 2"/>
+          <p:cNvSpPr txBox="1"/>
+          <p:nvPr/>
+        </p:nvSpPr>
+        <p:spPr>
+          <a:xfrm>
+            <a:off x="713232" y="566928"/>
+            <a:ext cx="10058400" cy="320040"/>
+          </a:xfrm>
+          <a:prstGeom prst="rect">
+            <a:avLst/>
+          </a:prstGeom>
+          <a:noFill/>
+        </p:spPr>
+        <p:txBody>
+          <a:bodyPr wrap="square" anchor="t" lIns="0" rIns="0" tIns="0" bIns="0">
+            <a:spAutoFit/>
+          </a:bodyPr>
+          <a:lstStyle/>
+          <a:p>
+            <a:pPr algn="l">
+              <a:lnSpc>
+                <a:spcPct val="100000"/>
+              </a:lnSpc>
+              <a:spcBef>
+                <a:spcPts val="0"/>
+              </a:spcBef>
+              <a:spcAft>
+                <a:spcPts val="0"/>
+              </a:spcAft>
+            </a:pPr>
+            <a:r>
+              <a:rPr sz="1200" b="0">
+                <a:solidFill>
+                  <a:srgbClr val="AEB8D6"/>
+                </a:solidFill>
+                <a:latin typeface="맑은 고딕"/>
+                <a:ea typeface="맑은 고딕"/>
+              </a:rPr>
+              <a:t>●  동아쏘시오그룹 · DAI   |   AI 헬스케어 플랫폼 팀장</a:t>
+            </a:r>
+          </a:p>
+        </p:txBody>
+      </p:sp>
+      <p:sp>
+        <p:nvSpPr>
+          <p:cNvPr id="4" name="TextBox 3"/>
+          <p:cNvSpPr txBox="1"/>
+          <p:nvPr/>
+        </p:nvSpPr>
+        <p:spPr>
+          <a:xfrm>
+            <a:off x="685800" y="1554480"/>
+            <a:ext cx="7315200" cy="320040"/>
+          </a:xfrm>
+          <a:prstGeom prst="rect">
+            <a:avLst/>
+          </a:prstGeom>
+          <a:noFill/>
+        </p:spPr>
+        <p:txBody>
+          <a:bodyPr wrap="square" anchor="t" lIns="0" rIns="0" tIns="0" bIns="0">
+            <a:spAutoFit/>
+          </a:bodyPr>
+          <a:lstStyle/>
+          <a:p>
+            <a:pPr algn="l">
+              <a:lnSpc>
+                <a:spcPct val="100000"/>
+              </a:lnSpc>
+              <a:spcBef>
+                <a:spcPts val="0"/>
+              </a:spcBef>
+              <a:spcAft>
+                <a:spcPts val="0"/>
+              </a:spcAft>
+            </a:pPr>
+            <a:r>
+              <a:rPr sz="1200" b="1" spc="220">
+                <a:solidFill>
+                  <a:srgbClr val="5FD0EE"/>
+                </a:solidFill>
+                <a:latin typeface="맑은 고딕"/>
+                <a:ea typeface="맑은 고딕"/>
+              </a:rPr>
+              <a:t>CLOSING</a:t>
+            </a:r>
+          </a:p>
+        </p:txBody>
+      </p:sp>
+      <p:cxnSp>
+        <p:nvCxnSpPr>
+          <p:cNvPr id="5" name="Connector 4"/>
+          <p:cNvCxnSpPr/>
+          <p:nvPr/>
+        </p:nvCxnSpPr>
+        <p:spPr>
+          <a:xfrm>
+            <a:off x="685800" y="1883664"/>
+            <a:ext cx="1737360" cy="0"/>
+          </a:xfrm>
+          <a:prstGeom prst="bentConnector3">
+            <a:avLst/>
+          </a:prstGeom>
+          <a:ln w="25400">
+            <a:solidFill>
+              <a:srgbClr val="2F7F9C"/>
+            </a:solidFill>
+          </a:ln>
+          <a:effectLst/>
+        </p:spPr>
+        <p:style>
+          <a:lnRef idx="2">
+            <a:schemeClr val="accent1"/>
+          </a:lnRef>
+          <a:fillRef idx="0">
+            <a:schemeClr val="accent1"/>
+          </a:fillRef>
+          <a:effectRef idx="1">
+            <a:schemeClr val="accent1"/>
+          </a:effectRef>
+          <a:fontRef idx="minor">
+            <a:schemeClr val="tx1"/>
+          </a:fontRef>
+        </p:style>
+      </p:cxnSp>
+      <p:sp>
+        <p:nvSpPr>
+          <p:cNvPr id="6" name="TextBox 5"/>
+          <p:cNvSpPr txBox="1"/>
+          <p:nvPr/>
+        </p:nvSpPr>
+        <p:spPr>
+          <a:xfrm>
+            <a:off x="685800" y="2011680"/>
+            <a:ext cx="10789920" cy="1554480"/>
+          </a:xfrm>
+          <a:prstGeom prst="rect">
+            <a:avLst/>
+          </a:prstGeom>
+          <a:noFill/>
+        </p:spPr>
+        <p:txBody>
+          <a:bodyPr wrap="square" anchor="t" lIns="0" rIns="0" tIns="0" bIns="0">
+            <a:spAutoFit/>
+          </a:bodyPr>
+          <a:lstStyle/>
+          <a:p>
+            <a:pPr algn="l">
+              <a:lnSpc>
+                <a:spcPct val="114000"/>
+              </a:lnSpc>
+              <a:spcBef>
+                <a:spcPts val="0"/>
+              </a:spcBef>
+              <a:spcAft>
+                <a:spcPts val="0"/>
+              </a:spcAft>
+            </a:pPr>
+            <a:r>
+              <a:rPr sz="4000" b="1">
+                <a:solidFill>
+                  <a:srgbClr val="FFFFFF"/>
+                </a:solidFill>
+                <a:latin typeface="맑은 고딕"/>
+                <a:ea typeface="맑은 고딕"/>
+              </a:rPr>
+              <a:t>DAI의 사업 과제를</a:t>
+            </a:r>
+          </a:p>
+          <a:p>
+            <a:pPr algn="l">
+              <a:lnSpc>
+                <a:spcPct val="114000"/>
+              </a:lnSpc>
+              <a:spcBef>
+                <a:spcPts val="0"/>
+              </a:spcBef>
+              <a:spcAft>
+                <a:spcPts val="0"/>
+              </a:spcAft>
+            </a:pPr>
+            <a:r>
+              <a:rPr sz="4000" b="1">
+                <a:solidFill>
+                  <a:srgbClr val="5FD0EE"/>
+                </a:solidFill>
+                <a:latin typeface="맑은 고딕"/>
+                <a:ea typeface="맑은 고딕"/>
+              </a:rPr>
+              <a:t>제품과 운영</a:t>
+            </a:r>
+            <a:r>
+              <a:rPr sz="4000" b="1">
+                <a:solidFill>
+                  <a:srgbClr val="FFFFFF"/>
+                </a:solidFill>
+                <a:latin typeface="맑은 고딕"/>
+                <a:ea typeface="맑은 고딕"/>
+              </a:rPr>
+              <a:t>으로 구체화하겠습니다</a:t>
+            </a:r>
+          </a:p>
+        </p:txBody>
+      </p:sp>
+      <p:sp>
+        <p:nvSpPr>
+          <p:cNvPr id="7" name="TextBox 6"/>
+          <p:cNvSpPr txBox="1"/>
+          <p:nvPr/>
+        </p:nvSpPr>
+        <p:spPr>
+          <a:xfrm>
+            <a:off x="713232" y="3977639"/>
+            <a:ext cx="3200400" cy="320040"/>
+          </a:xfrm>
+          <a:prstGeom prst="rect">
+            <a:avLst/>
+          </a:prstGeom>
+          <a:noFill/>
+        </p:spPr>
+        <p:txBody>
+          <a:bodyPr wrap="square" anchor="t" lIns="0" rIns="0" tIns="0" bIns="0">
+            <a:spAutoFit/>
+          </a:bodyPr>
+          <a:lstStyle/>
+          <a:p>
+            <a:pPr algn="l">
+              <a:lnSpc>
+                <a:spcPct val="100000"/>
+              </a:lnSpc>
+              <a:spcBef>
+                <a:spcPts val="0"/>
+              </a:spcBef>
+              <a:spcAft>
+                <a:spcPts val="0"/>
+              </a:spcAft>
+            </a:pPr>
+            <a:r>
+              <a:rPr sz="1300" b="1" spc="50">
+                <a:solidFill>
+                  <a:srgbClr val="5FD0EE"/>
+                </a:solidFill>
+                <a:latin typeface="맑은 고딕"/>
+                <a:ea typeface="맑은 고딕"/>
+              </a:rPr>
+              <a:t>01 · 전환</a:t>
+            </a:r>
+          </a:p>
+        </p:txBody>
+      </p:sp>
+      <p:sp>
+        <p:nvSpPr>
+          <p:cNvPr id="8" name="TextBox 7"/>
+          <p:cNvSpPr txBox="1"/>
+          <p:nvPr/>
+        </p:nvSpPr>
+        <p:spPr>
+          <a:xfrm>
+            <a:off x="713232" y="4343400"/>
+            <a:ext cx="3291840" cy="822960"/>
+          </a:xfrm>
+          <a:prstGeom prst="rect">
+            <a:avLst/>
+          </a:prstGeom>
+          <a:noFill/>
+        </p:spPr>
+        <p:txBody>
+          <a:bodyPr wrap="square" anchor="t" lIns="0" rIns="0" tIns="0" bIns="0">
+            <a:spAutoFit/>
+          </a:bodyPr>
+          <a:lstStyle/>
+          <a:p>
+            <a:pPr algn="l">
+              <a:lnSpc>
+                <a:spcPct val="130000"/>
+              </a:lnSpc>
+              <a:spcBef>
+                <a:spcPts val="0"/>
+              </a:spcBef>
+              <a:spcAft>
+                <a:spcPts val="0"/>
+              </a:spcAft>
+            </a:pPr>
+            <a:r>
+              <a:rPr sz="1700" b="1">
+                <a:solidFill>
+                  <a:srgbClr val="E7EBF6"/>
+                </a:solidFill>
+                <a:latin typeface="맑은 고딕"/>
+                <a:ea typeface="맑은 고딕"/>
+              </a:rPr>
+              <a:t>사용자 행동과 사업 전환을 함께 본 경험</a:t>
+            </a:r>
+          </a:p>
+        </p:txBody>
+      </p:sp>
+      <p:cxnSp>
+        <p:nvCxnSpPr>
+          <p:cNvPr id="9" name="Connector 8"/>
+          <p:cNvCxnSpPr/>
+          <p:nvPr/>
+        </p:nvCxnSpPr>
+        <p:spPr>
+          <a:xfrm>
+            <a:off x="4142232" y="3977639"/>
+            <a:ext cx="0" cy="868680"/>
+          </a:xfrm>
+          <a:prstGeom prst="bentConnector3">
+            <a:avLst/>
+          </a:prstGeom>
+          <a:ln w="12700">
+            <a:solidFill>
+              <a:srgbClr val="333B5E"/>
+            </a:solidFill>
+          </a:ln>
+          <a:effectLst/>
+        </p:spPr>
+        <p:style>
+          <a:lnRef idx="2">
+            <a:schemeClr val="accent1"/>
+          </a:lnRef>
+          <a:fillRef idx="0">
+            <a:schemeClr val="accent1"/>
+          </a:fillRef>
+          <a:effectRef idx="1">
+            <a:schemeClr val="accent1"/>
+          </a:effectRef>
+          <a:fontRef idx="minor">
+            <a:schemeClr val="tx1"/>
+          </a:fontRef>
+        </p:style>
+      </p:cxnSp>
+      <p:sp>
+        <p:nvSpPr>
+          <p:cNvPr id="10" name="TextBox 9"/>
+          <p:cNvSpPr txBox="1"/>
+          <p:nvPr/>
+        </p:nvSpPr>
+        <p:spPr>
+          <a:xfrm>
+            <a:off x="4325112" y="3977639"/>
+            <a:ext cx="3200400" cy="320040"/>
+          </a:xfrm>
+          <a:prstGeom prst="rect">
+            <a:avLst/>
+          </a:prstGeom>
+          <a:noFill/>
+        </p:spPr>
+        <p:txBody>
+          <a:bodyPr wrap="square" anchor="t" lIns="0" rIns="0" tIns="0" bIns="0">
+            <a:spAutoFit/>
+          </a:bodyPr>
+          <a:lstStyle/>
+          <a:p>
+            <a:pPr algn="l">
+              <a:lnSpc>
+                <a:spcPct val="100000"/>
+              </a:lnSpc>
+              <a:spcBef>
+                <a:spcPts val="0"/>
+              </a:spcBef>
+              <a:spcAft>
+                <a:spcPts val="0"/>
+              </a:spcAft>
+            </a:pPr>
+            <a:r>
+              <a:rPr sz="1300" b="1" spc="50">
+                <a:solidFill>
+                  <a:srgbClr val="5FD0EE"/>
+                </a:solidFill>
+                <a:latin typeface="맑은 고딕"/>
+                <a:ea typeface="맑은 고딕"/>
+              </a:rPr>
+              <a:t>02 · 연동</a:t>
+            </a:r>
+          </a:p>
+        </p:txBody>
+      </p:sp>
+      <p:sp>
+        <p:nvSpPr>
+          <p:cNvPr id="11" name="TextBox 10"/>
+          <p:cNvSpPr txBox="1"/>
+          <p:nvPr/>
+        </p:nvSpPr>
+        <p:spPr>
+          <a:xfrm>
+            <a:off x="4325112" y="4343400"/>
+            <a:ext cx="3291840" cy="822960"/>
+          </a:xfrm>
+          <a:prstGeom prst="rect">
+            <a:avLst/>
+          </a:prstGeom>
+          <a:noFill/>
+        </p:spPr>
+        <p:txBody>
+          <a:bodyPr wrap="square" anchor="t" lIns="0" rIns="0" tIns="0" bIns="0">
+            <a:spAutoFit/>
+          </a:bodyPr>
+          <a:lstStyle/>
+          <a:p>
+            <a:pPr algn="l">
+              <a:lnSpc>
+                <a:spcPct val="130000"/>
+              </a:lnSpc>
+              <a:spcBef>
+                <a:spcPts val="0"/>
+              </a:spcBef>
+              <a:spcAft>
+                <a:spcPts val="0"/>
+              </a:spcAft>
+            </a:pPr>
+            <a:r>
+              <a:rPr sz="1700" b="1">
+                <a:solidFill>
+                  <a:srgbClr val="E7EBF6"/>
+                </a:solidFill>
+                <a:latin typeface="맑은 고딕"/>
+                <a:ea typeface="맑은 고딕"/>
+              </a:rPr>
+              <a:t>현장 업무와 외부 시스템을 연결한 경험</a:t>
+            </a:r>
+          </a:p>
+        </p:txBody>
+      </p:sp>
+      <p:cxnSp>
+        <p:nvCxnSpPr>
+          <p:cNvPr id="12" name="Connector 11"/>
+          <p:cNvCxnSpPr/>
+          <p:nvPr/>
+        </p:nvCxnSpPr>
+        <p:spPr>
+          <a:xfrm>
+            <a:off x="7754112" y="3977639"/>
+            <a:ext cx="0" cy="868680"/>
+          </a:xfrm>
+          <a:prstGeom prst="bentConnector3">
+            <a:avLst/>
+          </a:prstGeom>
+          <a:ln w="12700">
+            <a:solidFill>
+              <a:srgbClr val="333B5E"/>
+            </a:solidFill>
+          </a:ln>
+          <a:effectLst/>
+        </p:spPr>
+        <p:style>
+          <a:lnRef idx="2">
+            <a:schemeClr val="accent1"/>
+          </a:lnRef>
+          <a:fillRef idx="0">
+            <a:schemeClr val="accent1"/>
+          </a:fillRef>
+          <a:effectRef idx="1">
+            <a:schemeClr val="accent1"/>
+          </a:effectRef>
+          <a:fontRef idx="minor">
+            <a:schemeClr val="tx1"/>
+          </a:fontRef>
+        </p:style>
+      </p:cxnSp>
+      <p:sp>
+        <p:nvSpPr>
+          <p:cNvPr id="13" name="TextBox 12"/>
+          <p:cNvSpPr txBox="1"/>
+          <p:nvPr/>
+        </p:nvSpPr>
+        <p:spPr>
+          <a:xfrm>
+            <a:off x="7936992" y="3977639"/>
+            <a:ext cx="3200400" cy="320040"/>
+          </a:xfrm>
+          <a:prstGeom prst="rect">
+            <a:avLst/>
+          </a:prstGeom>
+          <a:noFill/>
+        </p:spPr>
+        <p:txBody>
+          <a:bodyPr wrap="square" anchor="t" lIns="0" rIns="0" tIns="0" bIns="0">
+            <a:spAutoFit/>
+          </a:bodyPr>
+          <a:lstStyle/>
+          <a:p>
+            <a:pPr algn="l">
+              <a:lnSpc>
+                <a:spcPct val="100000"/>
+              </a:lnSpc>
+              <a:spcBef>
+                <a:spcPts val="0"/>
+              </a:spcBef>
+              <a:spcAft>
+                <a:spcPts val="0"/>
+              </a:spcAft>
+            </a:pPr>
+            <a:r>
+              <a:rPr sz="1300" b="1" spc="50">
+                <a:solidFill>
+                  <a:srgbClr val="5FD0EE"/>
+                </a:solidFill>
+                <a:latin typeface="맑은 고딕"/>
+                <a:ea typeface="맑은 고딕"/>
+              </a:rPr>
+              <a:t>03 · 실행</a:t>
+            </a:r>
+          </a:p>
+        </p:txBody>
+      </p:sp>
+      <p:sp>
+        <p:nvSpPr>
+          <p:cNvPr id="14" name="TextBox 13"/>
+          <p:cNvSpPr txBox="1"/>
+          <p:nvPr/>
+        </p:nvSpPr>
+        <p:spPr>
+          <a:xfrm>
+            <a:off x="7936992" y="4343400"/>
+            <a:ext cx="3291840" cy="822960"/>
+          </a:xfrm>
+          <a:prstGeom prst="rect">
+            <a:avLst/>
+          </a:prstGeom>
+          <a:noFill/>
+        </p:spPr>
+        <p:txBody>
+          <a:bodyPr wrap="square" anchor="t" lIns="0" rIns="0" tIns="0" bIns="0">
+            <a:spAutoFit/>
+          </a:bodyPr>
+          <a:lstStyle/>
+          <a:p>
+            <a:pPr algn="l">
+              <a:lnSpc>
+                <a:spcPct val="130000"/>
+              </a:lnSpc>
+              <a:spcBef>
+                <a:spcPts val="0"/>
+              </a:spcBef>
+              <a:spcAft>
+                <a:spcPts val="0"/>
+              </a:spcAft>
+            </a:pPr>
+            <a:r>
+              <a:rPr sz="1700" b="1">
+                <a:solidFill>
+                  <a:srgbClr val="E7EBF6"/>
+                </a:solidFill>
+                <a:latin typeface="맑은 고딕"/>
+                <a:ea typeface="맑은 고딕"/>
+              </a:rPr>
+              <a:t>우선순위를 정하고 여러 팀의 실행을 이끈 경험</a:t>
+            </a:r>
+          </a:p>
+        </p:txBody>
+      </p:sp>
+      <p:sp>
+        <p:nvSpPr>
+          <p:cNvPr id="15" name="TextBox 14"/>
+          <p:cNvSpPr txBox="1"/>
+          <p:nvPr/>
+        </p:nvSpPr>
+        <p:spPr>
+          <a:xfrm>
+            <a:off x="713232" y="5349240"/>
+            <a:ext cx="10698480" cy="822960"/>
+          </a:xfrm>
+          <a:prstGeom prst="rect">
+            <a:avLst/>
+          </a:prstGeom>
+          <a:noFill/>
+        </p:spPr>
+        <p:txBody>
+          <a:bodyPr wrap="square" anchor="t" lIns="0" rIns="0" tIns="0" bIns="0">
+            <a:spAutoFit/>
+          </a:bodyPr>
+          <a:lstStyle/>
+          <a:p>
+            <a:pPr algn="l">
+              <a:lnSpc>
+                <a:spcPct val="130000"/>
+              </a:lnSpc>
+              <a:spcBef>
+                <a:spcPts val="0"/>
+              </a:spcBef>
+              <a:spcAft>
+                <a:spcPts val="0"/>
+              </a:spcAft>
+            </a:pPr>
+            <a:r>
+              <a:rPr sz="2200" b="0">
+                <a:solidFill>
+                  <a:srgbClr val="C7CEE4"/>
+                </a:solidFill>
+                <a:latin typeface="맑은 고딕"/>
+                <a:ea typeface="맑은 고딕"/>
+              </a:rPr>
+              <a:t>필요한 전문성과 협업하며, </a:t>
+            </a:r>
+            <a:r>
+              <a:rPr sz="2200" b="1">
+                <a:solidFill>
+                  <a:srgbClr val="FFFFFF"/>
+                </a:solidFill>
+                <a:latin typeface="맑은 고딕"/>
+                <a:ea typeface="맑은 고딕"/>
+              </a:rPr>
+              <a:t>판단의 근거와 실행 결과를 끝까지 설명</a:t>
+            </a:r>
+            <a:r>
+              <a:rPr sz="2200" b="0">
+                <a:solidFill>
+                  <a:srgbClr val="C7CEE4"/>
+                </a:solidFill>
+                <a:latin typeface="맑은 고딕"/>
+                <a:ea typeface="맑은 고딕"/>
+              </a:rPr>
+              <a:t>하는 팀장이 되겠습니다.</a:t>
+            </a:r>
+          </a:p>
+        </p:txBody>
+      </p:sp>
+      <p:sp>
+        <p:nvSpPr>
+          <p:cNvPr id="16" name="TextBox 15"/>
+          <p:cNvSpPr txBox="1"/>
+          <p:nvPr/>
+        </p:nvSpPr>
+        <p:spPr>
+          <a:xfrm>
+            <a:off x="685800" y="6382512"/>
+            <a:ext cx="8778240" cy="384048"/>
+          </a:xfrm>
+          <a:prstGeom prst="rect">
+            <a:avLst/>
+          </a:prstGeom>
+          <a:noFill/>
+        </p:spPr>
+        <p:txBody>
+          <a:bodyPr wrap="square" anchor="t" lIns="0" rIns="0" tIns="0" bIns="0">
+            <a:spAutoFit/>
+          </a:bodyPr>
+          <a:lstStyle/>
+          <a:p>
+            <a:pPr algn="l">
+              <a:lnSpc>
+                <a:spcPct val="125000"/>
+              </a:lnSpc>
+              <a:spcBef>
+                <a:spcPts val="0"/>
+              </a:spcBef>
+              <a:spcAft>
+                <a:spcPts val="0"/>
+              </a:spcAft>
+            </a:pPr>
+            <a:r>
+              <a:rPr sz="1050" b="0">
+                <a:solidFill>
+                  <a:srgbClr val="7F89AB"/>
+                </a:solidFill>
+                <a:latin typeface="맑은 고딕"/>
+                <a:ea typeface="맑은 고딕"/>
+              </a:rPr>
+              <a:t>감사합니다. 질문 부탁드립니다.  ·  정치성</a:t>
+            </a:r>
+          </a:p>
+        </p:txBody>
+      </p:sp>
+      <p:sp>
+        <p:nvSpPr>
+          <p:cNvPr id="17" name="TextBox 16"/>
+          <p:cNvSpPr txBox="1"/>
+          <p:nvPr/>
+        </p:nvSpPr>
+        <p:spPr>
+          <a:xfrm>
+            <a:off x="10058400" y="6382512"/>
+            <a:ext cx="1463040" cy="320040"/>
+          </a:xfrm>
+          <a:prstGeom prst="rect">
+            <a:avLst/>
+          </a:prstGeom>
+          <a:noFill/>
+        </p:spPr>
+        <p:txBody>
+          <a:bodyPr wrap="square" anchor="t" lIns="0" rIns="0" tIns="0" bIns="0">
+            <a:spAutoFit/>
+          </a:bodyPr>
+          <a:lstStyle/>
+          <a:p>
+            <a:pPr algn="r">
+              <a:lnSpc>
+                <a:spcPct val="100000"/>
+              </a:lnSpc>
+              <a:spcBef>
+                <a:spcPts val="0"/>
+              </a:spcBef>
+              <a:spcAft>
+                <a:spcPts val="0"/>
+              </a:spcAft>
+            </a:pPr>
+            <a:r>
+              <a:rPr sz="1100" b="1" spc="140">
+                <a:solidFill>
+                  <a:srgbClr val="7F89AB"/>
+                </a:solidFill>
+                <a:latin typeface="맑은 고딕"/>
+                <a:ea typeface="맑은 고딕"/>
+              </a:rPr>
+              <a:t>10 / 10</a:t>
             </a:r>
           </a:p>
         </p:txBody>
@@ -3837,7 +4613,7 @@
               </a:spcAft>
             </a:pPr>
             <a:r>
-              <a:rPr sz="3000" b="1">
+              <a:rPr sz="3300" b="1">
                 <a:solidFill>
                   <a:srgbClr val="171A2E"/>
                 </a:solidFill>
@@ -3847,7 +4623,7 @@
               <a:t>복잡한 요구를 </a:t>
             </a:r>
             <a:r>
-              <a:rPr sz="3000" b="1">
+              <a:rPr sz="3300" b="1">
                 <a:solidFill>
                   <a:srgbClr val="0C6D8C"/>
                 </a:solidFill>
@@ -3857,7 +4633,7 @@
               <a:t>서비스 정책과 업무 흐름</a:t>
             </a:r>
             <a:r>
-              <a:rPr sz="3000" b="1">
+              <a:rPr sz="3300" b="1">
                 <a:solidFill>
                   <a:srgbClr val="171A2E"/>
                 </a:solidFill>
@@ -5282,7 +6058,7 @@
                 <a:latin typeface="맑은 고딕"/>
                 <a:ea typeface="맑은 고딕"/>
               </a:rPr>
-              <a:t>02 / 09</a:t>
+              <a:t>02 / 10</a:t>
             </a:r>
           </a:p>
         </p:txBody>
@@ -5511,7 +6287,7 @@
               </a:spcAft>
             </a:pPr>
             <a:r>
-              <a:rPr sz="3000" b="1">
+              <a:rPr sz="3300" b="1">
                 <a:solidFill>
                   <a:srgbClr val="171A2E"/>
                 </a:solidFill>
@@ -5521,7 +6297,7 @@
               <a:t>보험분석 상담신청 페이지 </a:t>
             </a:r>
             <a:r>
-              <a:rPr sz="3000" b="1">
+              <a:rPr sz="3300" b="1">
                 <a:solidFill>
                   <a:srgbClr val="0C6D8C"/>
                 </a:solidFill>
@@ -7387,7 +8163,7 @@
                 <a:latin typeface="맑은 고딕"/>
                 <a:ea typeface="맑은 고딕"/>
               </a:rPr>
-              <a:t>03 / 09</a:t>
+              <a:t>03 / 10</a:t>
             </a:r>
           </a:p>
         </p:txBody>
@@ -7616,7 +8392,7 @@
               </a:spcAft>
             </a:pPr>
             <a:r>
-              <a:rPr sz="3000" b="1">
+              <a:rPr sz="3300" b="1">
                 <a:solidFill>
                   <a:srgbClr val="171A2E"/>
                 </a:solidFill>
@@ -7626,7 +8402,7 @@
               <a:t>직배송 확인 업무를 </a:t>
             </a:r>
             <a:r>
-              <a:rPr sz="3000" b="1">
+              <a:rPr sz="3300" b="1">
                 <a:solidFill>
                   <a:srgbClr val="0C6D8C"/>
                 </a:solidFill>
@@ -8870,7 +9646,7 @@
                 <a:latin typeface="맑은 고딕"/>
                 <a:ea typeface="맑은 고딕"/>
               </a:rPr>
-              <a:t>04 / 09</a:t>
+              <a:t>04 / 10</a:t>
             </a:r>
           </a:p>
         </p:txBody>
@@ -9099,7 +9875,7 @@
               </a:spcAft>
             </a:pPr>
             <a:r>
-              <a:rPr sz="3000" b="1">
+              <a:rPr sz="3300" b="1">
                 <a:solidFill>
                   <a:srgbClr val="171A2E"/>
                 </a:solidFill>
@@ -9109,7 +9885,7 @@
               <a:t>EMR API와 환자 이용 흐름을 연결한 </a:t>
             </a:r>
             <a:r>
-              <a:rPr sz="3000" b="1">
+              <a:rPr sz="3300" b="1">
                 <a:solidFill>
                   <a:srgbClr val="0C6D8C"/>
                 </a:solidFill>
@@ -10866,7 +11642,7 @@
                 <a:latin typeface="맑은 고딕"/>
                 <a:ea typeface="맑은 고딕"/>
               </a:rPr>
-              <a:t>05 / 09</a:t>
+              <a:t>05 / 10</a:t>
             </a:r>
           </a:p>
         </p:txBody>
@@ -11095,7 +11871,7 @@
               </a:spcAft>
             </a:pPr>
             <a:r>
-              <a:rPr sz="3000" b="1">
+              <a:rPr sz="3300" b="1">
                 <a:solidFill>
                   <a:srgbClr val="171A2E"/>
                 </a:solidFill>
@@ -11105,7 +11881,7 @@
               <a:t>여러 사업의 요청을 </a:t>
             </a:r>
             <a:r>
-              <a:rPr sz="3000" b="1">
+              <a:rPr sz="3300" b="1">
                 <a:solidFill>
                   <a:srgbClr val="0C6D8C"/>
                 </a:solidFill>
@@ -11115,7 +11891,7 @@
               <a:t>우선순위와 팀별 책임</a:t>
             </a:r>
             <a:r>
-              <a:rPr sz="3000" b="1">
+              <a:rPr sz="3300" b="1">
                 <a:solidFill>
                   <a:srgbClr val="171A2E"/>
                 </a:solidFill>
@@ -12615,7 +13391,7 @@
                 <a:latin typeface="맑은 고딕"/>
                 <a:ea typeface="맑은 고딕"/>
               </a:rPr>
-              <a:t>06 / 09</a:t>
+              <a:t>06 / 10</a:t>
             </a:r>
           </a:p>
         </p:txBody>
@@ -12844,7 +13620,7 @@
               </a:spcAft>
             </a:pPr>
             <a:r>
-              <a:rPr sz="3000" b="1">
+              <a:rPr sz="3300" b="1">
                 <a:solidFill>
                   <a:srgbClr val="171A2E"/>
                 </a:solidFill>
@@ -12854,7 +13630,7 @@
               <a:t>AI로 요구사항을 구체화하고, </a:t>
             </a:r>
             <a:r>
-              <a:rPr sz="3000" b="1">
+              <a:rPr sz="3300" b="1">
                 <a:solidFill>
                   <a:srgbClr val="0C6D8C"/>
                 </a:solidFill>
@@ -12864,7 +13640,7 @@
               <a:t>적용 효과와 운영 품질</a:t>
             </a:r>
             <a:r>
-              <a:rPr sz="3000" b="1">
+              <a:rPr sz="3300" b="1">
                 <a:solidFill>
                   <a:srgbClr val="171A2E"/>
                 </a:solidFill>
@@ -14182,7 +14958,7 @@
                 <a:latin typeface="맑은 고딕"/>
                 <a:ea typeface="맑은 고딕"/>
               </a:rPr>
-              <a:t>07 / 09</a:t>
+              <a:t>07 / 10</a:t>
             </a:r>
           </a:p>
         </p:txBody>
@@ -14411,7 +15187,7 @@
               </a:spcAft>
             </a:pPr>
             <a:r>
-              <a:rPr sz="3000" b="1">
+              <a:rPr sz="3300" b="1">
                 <a:solidFill>
                   <a:srgbClr val="171A2E"/>
                 </a:solidFill>
@@ -14421,7 +15197,7 @@
               <a:t>사업 목표와 실행 조건에 따라 </a:t>
             </a:r>
             <a:r>
-              <a:rPr sz="3000" b="1">
+              <a:rPr sz="3300" b="1">
                 <a:solidFill>
                   <a:srgbClr val="0C6D8C"/>
                 </a:solidFill>
@@ -16418,7 +17194,7 @@
                 <a:latin typeface="맑은 고딕"/>
                 <a:ea typeface="맑은 고딕"/>
               </a:rPr>
-              <a:t>08 / 09</a:t>
+              <a:t>08 / 10</a:t>
             </a:r>
           </a:p>
         </p:txBody>
@@ -16456,6 +17232,348 @@
             <a:avLst/>
           </a:prstGeom>
           <a:solidFill>
+            <a:srgbClr val="FBFAF6"/>
+          </a:solidFill>
+          <a:ln>
+            <a:noFill/>
+          </a:ln>
+          <a:effectLst/>
+        </p:spPr>
+        <p:style>
+          <a:lnRef idx="1">
+            <a:schemeClr val="accent1"/>
+          </a:lnRef>
+          <a:fillRef idx="3">
+            <a:schemeClr val="accent1"/>
+          </a:fillRef>
+          <a:effectRef idx="2">
+            <a:schemeClr val="accent1"/>
+          </a:effectRef>
+          <a:fontRef idx="minor">
+            <a:schemeClr val="lt1"/>
+          </a:fontRef>
+        </p:style>
+        <p:txBody>
+          <a:bodyPr rtlCol="0" anchor="ctr"/>
+          <a:lstStyle/>
+          <a:p>
+            <a:pPr algn="ctr"/>
+          </a:p>
+        </p:txBody>
+      </p:sp>
+      <p:sp>
+        <p:nvSpPr>
+          <p:cNvPr id="3" name="TextBox 2"/>
+          <p:cNvSpPr txBox="1"/>
+          <p:nvPr/>
+        </p:nvSpPr>
+        <p:spPr>
+          <a:xfrm>
+            <a:off x="9875520" y="457200"/>
+            <a:ext cx="2194560" cy="274320"/>
+          </a:xfrm>
+          <a:prstGeom prst="rect">
+            <a:avLst/>
+          </a:prstGeom>
+          <a:noFill/>
+        </p:spPr>
+        <p:txBody>
+          <a:bodyPr wrap="square" anchor="t" lIns="0" rIns="0" tIns="0" bIns="0">
+            <a:spAutoFit/>
+          </a:bodyPr>
+          <a:lstStyle/>
+          <a:p>
+            <a:pPr algn="r">
+              <a:lnSpc>
+                <a:spcPct val="100000"/>
+              </a:lnSpc>
+              <a:spcBef>
+                <a:spcPts val="0"/>
+              </a:spcBef>
+              <a:spcAft>
+                <a:spcPts val="0"/>
+              </a:spcAft>
+            </a:pPr>
+            <a:r>
+              <a:rPr sz="1100" b="1" spc="120">
+                <a:solidFill>
+                  <a:srgbClr val="A9AEC2"/>
+                </a:solidFill>
+                <a:latin typeface="맑은 고딕"/>
+                <a:ea typeface="맑은 고딕"/>
+              </a:rPr>
+              <a:t>DAI · 정치성</a:t>
+            </a:r>
+          </a:p>
+        </p:txBody>
+      </p:sp>
+      <p:sp>
+        <p:nvSpPr>
+          <p:cNvPr id="4" name="TextBox 3"/>
+          <p:cNvSpPr txBox="1"/>
+          <p:nvPr/>
+        </p:nvSpPr>
+        <p:spPr>
+          <a:xfrm>
+            <a:off x="685800" y="502920"/>
+            <a:ext cx="7315200" cy="320040"/>
+          </a:xfrm>
+          <a:prstGeom prst="rect">
+            <a:avLst/>
+          </a:prstGeom>
+          <a:noFill/>
+        </p:spPr>
+        <p:txBody>
+          <a:bodyPr wrap="square" anchor="t" lIns="0" rIns="0" tIns="0" bIns="0">
+            <a:spAutoFit/>
+          </a:bodyPr>
+          <a:lstStyle/>
+          <a:p>
+            <a:pPr algn="l">
+              <a:lnSpc>
+                <a:spcPct val="100000"/>
+              </a:lnSpc>
+              <a:spcBef>
+                <a:spcPts val="0"/>
+              </a:spcBef>
+              <a:spcAft>
+                <a:spcPts val="0"/>
+              </a:spcAft>
+            </a:pPr>
+            <a:r>
+              <a:rPr sz="1200" b="1" spc="220">
+                <a:solidFill>
+                  <a:srgbClr val="1391B8"/>
+                </a:solidFill>
+                <a:latin typeface="맑은 고딕"/>
+                <a:ea typeface="맑은 고딕"/>
+              </a:rPr>
+              <a:t>DAI 기여 · 첫 검증 가설</a:t>
+            </a:r>
+          </a:p>
+        </p:txBody>
+      </p:sp>
+      <p:cxnSp>
+        <p:nvCxnSpPr>
+          <p:cNvPr id="5" name="Connector 4"/>
+          <p:cNvCxnSpPr/>
+          <p:nvPr/>
+        </p:nvCxnSpPr>
+        <p:spPr>
+          <a:xfrm>
+            <a:off x="685800" y="832104"/>
+            <a:ext cx="1737360" cy="0"/>
+          </a:xfrm>
+          <a:prstGeom prst="bentConnector3">
+            <a:avLst/>
+          </a:prstGeom>
+          <a:ln w="25400">
+            <a:solidFill>
+              <a:srgbClr val="1391B8"/>
+            </a:solidFill>
+          </a:ln>
+          <a:effectLst/>
+        </p:spPr>
+        <p:style>
+          <a:lnRef idx="2">
+            <a:schemeClr val="accent1"/>
+          </a:lnRef>
+          <a:fillRef idx="0">
+            <a:schemeClr val="accent1"/>
+          </a:fillRef>
+          <a:effectRef idx="1">
+            <a:schemeClr val="accent1"/>
+          </a:effectRef>
+          <a:fontRef idx="minor">
+            <a:schemeClr val="tx1"/>
+          </a:fontRef>
+        </p:style>
+      </p:cxnSp>
+      <p:sp>
+        <p:nvSpPr>
+          <p:cNvPr id="6" name="TextBox 5"/>
+          <p:cNvSpPr txBox="1"/>
+          <p:nvPr/>
+        </p:nvSpPr>
+        <p:spPr>
+          <a:xfrm>
+            <a:off x="685800" y="932688"/>
+            <a:ext cx="10789920" cy="1234440"/>
+          </a:xfrm>
+          <a:prstGeom prst="rect">
+            <a:avLst/>
+          </a:prstGeom>
+          <a:noFill/>
+        </p:spPr>
+        <p:txBody>
+          <a:bodyPr wrap="square" anchor="t" lIns="0" rIns="0" tIns="0" bIns="0">
+            <a:spAutoFit/>
+          </a:bodyPr>
+          <a:lstStyle/>
+          <a:p>
+            <a:pPr algn="l">
+              <a:lnSpc>
+                <a:spcPct val="112000"/>
+              </a:lnSpc>
+              <a:spcBef>
+                <a:spcPts val="0"/>
+              </a:spcBef>
+              <a:spcAft>
+                <a:spcPts val="0"/>
+              </a:spcAft>
+            </a:pPr>
+            <a:r>
+              <a:rPr sz="3300" b="1">
+                <a:solidFill>
+                  <a:srgbClr val="171A2E"/>
+                </a:solidFill>
+                <a:latin typeface="맑은 고딕"/>
+                <a:ea typeface="맑은 고딕"/>
+              </a:rPr>
+              <a:t>먼저 증명할 </a:t>
+            </a:r>
+            <a:r>
+              <a:rPr sz="3300" b="1">
+                <a:solidFill>
+                  <a:srgbClr val="0C6D8C"/>
+                </a:solidFill>
+                <a:latin typeface="맑은 고딕"/>
+                <a:ea typeface="맑은 고딕"/>
+              </a:rPr>
+              <a:t>두 가지 실행 가설</a:t>
+            </a:r>
+          </a:p>
+        </p:txBody>
+      </p:sp>
+      <p:sp>
+        <p:nvSpPr>
+          <p:cNvPr id="7" name="TextBox 6"/>
+          <p:cNvSpPr txBox="1"/>
+          <p:nvPr/>
+        </p:nvSpPr>
+        <p:spPr>
+          <a:xfrm>
+            <a:off x="685800" y="1554480"/>
+            <a:ext cx="10881360" cy="365760"/>
+          </a:xfrm>
+          <a:prstGeom prst="rect">
+            <a:avLst/>
+          </a:prstGeom>
+          <a:noFill/>
+        </p:spPr>
+        <p:txBody>
+          <a:bodyPr wrap="square" anchor="t" lIns="0" rIns="0" tIns="0" bIns="0">
+            <a:spAutoFit/>
+          </a:bodyPr>
+          <a:lstStyle/>
+          <a:p>
+            <a:pPr algn="l">
+              <a:lnSpc>
+                <a:spcPct val="100000"/>
+              </a:lnSpc>
+              <a:spcBef>
+                <a:spcPts val="0"/>
+              </a:spcBef>
+              <a:spcAft>
+                <a:spcPts val="0"/>
+              </a:spcAft>
+            </a:pPr>
+            <a:r>
+              <a:rPr sz="1400" b="0">
+                <a:solidFill>
+                  <a:srgbClr val="7C8299"/>
+                </a:solidFill>
+                <a:latin typeface="맑은 고딕"/>
+                <a:ea typeface="맑은 고딕"/>
+              </a:rPr>
+              <a:t>공개된 그룹 자산과 제 경험에서 좁힌 </a:t>
+            </a:r>
+            <a:r>
+              <a:rPr sz="1400" b="1">
+                <a:solidFill>
+                  <a:srgbClr val="0C6D8C"/>
+                </a:solidFill>
+                <a:latin typeface="맑은 고딕"/>
+                <a:ea typeface="맑은 고딕"/>
+              </a:rPr>
+              <a:t>가설</a:t>
+            </a:r>
+            <a:r>
+              <a:rPr sz="1400" b="0">
+                <a:solidFill>
+                  <a:srgbClr val="7C8299"/>
+                </a:solidFill>
+                <a:latin typeface="맑은 고딕"/>
+                <a:ea typeface="맑은 고딕"/>
+              </a:rPr>
+              <a:t>입니다. 확정 계획이 아니라, 입사 후 함께 검증할 출발점으로 제안합니다.</a:t>
+            </a:r>
+          </a:p>
+        </p:txBody>
+      </p:sp>
+      <p:sp>
+        <p:nvSpPr>
+          <p:cNvPr id="8" name="Rounded Rectangle 7"/>
+          <p:cNvSpPr/>
+          <p:nvPr/>
+        </p:nvSpPr>
+        <p:spPr>
+          <a:xfrm>
+            <a:off x="685800" y="2057400"/>
+            <a:ext cx="5330952" cy="3063240"/>
+          </a:xfrm>
+          <a:prstGeom prst="roundRect">
+            <a:avLst>
+              <a:gd name="adj" fmla="val 10000"/>
+            </a:avLst>
+          </a:prstGeom>
+          <a:solidFill>
+            <a:srgbClr val="FFFFFF"/>
+          </a:solidFill>
+          <a:ln w="15240">
+            <a:solidFill>
+              <a:srgbClr val="E5E8F0"/>
+            </a:solidFill>
+          </a:ln>
+          <a:effectLst/>
+        </p:spPr>
+        <p:style>
+          <a:lnRef idx="1">
+            <a:schemeClr val="accent1"/>
+          </a:lnRef>
+          <a:fillRef idx="3">
+            <a:schemeClr val="accent1"/>
+          </a:fillRef>
+          <a:effectRef idx="2">
+            <a:schemeClr val="accent1"/>
+          </a:effectRef>
+          <a:fontRef idx="minor">
+            <a:schemeClr val="lt1"/>
+          </a:fontRef>
+        </p:style>
+        <p:txBody>
+          <a:bodyPr rtlCol="0" anchor="ctr"/>
+          <a:lstStyle/>
+          <a:p>
+            <a:pPr algn="ctr"/>
+          </a:p>
+        </p:txBody>
+      </p:sp>
+      <p:sp>
+        <p:nvSpPr>
+          <p:cNvPr id="9" name="Rectangle 8"/>
+          <p:cNvSpPr/>
+          <p:nvPr/>
+        </p:nvSpPr>
+        <p:spPr>
+          <a:xfrm>
+            <a:off x="685800" y="2057400"/>
+            <a:ext cx="5330952" cy="841248"/>
+          </a:xfrm>
+          <a:prstGeom prst="rect">
+            <a:avLst/>
+          </a:prstGeom>
+          <a:solidFill>
             <a:srgbClr val="141A33"/>
           </a:solidFill>
           <a:ln>
@@ -16487,14 +17605,14 @@
       </p:sp>
       <p:sp>
         <p:nvSpPr>
-          <p:cNvPr id="3" name="TextBox 2"/>
+          <p:cNvPr id="10" name="TextBox 9"/>
           <p:cNvSpPr txBox="1"/>
           <p:nvPr/>
         </p:nvSpPr>
         <p:spPr>
           <a:xfrm>
-            <a:off x="713232" y="566928"/>
-            <a:ext cx="10058400" cy="320040"/>
+            <a:off x="941832" y="2185416"/>
+            <a:ext cx="4873752" cy="640080"/>
           </a:xfrm>
           <a:prstGeom prst="rect">
             <a:avLst/>
@@ -16519,28 +17637,51 @@
               </a:spcAft>
             </a:pPr>
             <a:r>
-              <a:rPr sz="1200" b="0">
-                <a:solidFill>
-                  <a:srgbClr val="AEB8D6"/>
-                </a:solidFill>
-                <a:latin typeface="맑은 고딕"/>
-                <a:ea typeface="맑은 고딕"/>
-              </a:rPr>
-              <a:t>●  동아쏘시오그룹 · DAI   |   AI 헬스케어 플랫폼 팀장</a:t>
-            </a:r>
-          </a:p>
-        </p:txBody>
-      </p:sp>
-      <p:sp>
-        <p:nvSpPr>
-          <p:cNvPr id="4" name="TextBox 3"/>
+              <a:rPr sz="1250" b="1" spc="40">
+                <a:solidFill>
+                  <a:srgbClr val="5FD0EE"/>
+                </a:solidFill>
+                <a:latin typeface="맑은 고딕"/>
+                <a:ea typeface="맑은 고딕"/>
+              </a:rPr>
+              <a:t>가설 A · 환자 경험 연결</a:t>
+            </a:r>
+          </a:p>
+          <a:p>
+            <a:pPr algn="l">
+              <a:lnSpc>
+                <a:spcPct val="120000"/>
+              </a:lnSpc>
+              <a:spcBef>
+                <a:spcPts val="400"/>
+              </a:spcBef>
+              <a:spcAft>
+                <a:spcPts val="0"/>
+              </a:spcAft>
+            </a:pPr>
+            <a:r>
+              <a:rPr sz="1650" b="1">
+                <a:solidFill>
+                  <a:srgbClr val="FFFFFF"/>
+                </a:solidFill>
+                <a:latin typeface="맑은 고딕"/>
+                <a:ea typeface="맑은 고딕"/>
+              </a:rPr>
+              <a:t>흩어진 모니터링·관리 접점을  하나의 환자 흐름으로 잇는다</a:t>
+            </a:r>
+          </a:p>
+        </p:txBody>
+      </p:sp>
+      <p:sp>
+        <p:nvSpPr>
+          <p:cNvPr id="11" name="TextBox 10"/>
           <p:cNvSpPr txBox="1"/>
           <p:nvPr/>
         </p:nvSpPr>
         <p:spPr>
           <a:xfrm>
-            <a:off x="685800" y="1554480"/>
-            <a:ext cx="7315200" cy="320040"/>
+            <a:off x="941832" y="3026664"/>
+            <a:ext cx="868680" cy="457200"/>
           </a:xfrm>
           <a:prstGeom prst="rect">
             <a:avLst/>
@@ -16565,64 +17706,546 @@
               </a:spcAft>
             </a:pPr>
             <a:r>
-              <a:rPr sz="1200" b="1" spc="220">
-                <a:solidFill>
-                  <a:srgbClr val="5FD0EE"/>
-                </a:solidFill>
-                <a:latin typeface="맑은 고딕"/>
-                <a:ea typeface="맑은 고딕"/>
-              </a:rPr>
-              <a:t>CLOSING</a:t>
-            </a:r>
-          </a:p>
-        </p:txBody>
-      </p:sp>
-      <p:cxnSp>
-        <p:nvCxnSpPr>
-          <p:cNvPr id="5" name="Connector 4"/>
-          <p:cNvCxnSpPr/>
-          <p:nvPr/>
-        </p:nvCxnSpPr>
-        <p:spPr>
-          <a:xfrm>
-            <a:off x="685800" y="1883664"/>
-            <a:ext cx="1737360" cy="0"/>
-          </a:xfrm>
-          <a:prstGeom prst="bentConnector3">
-            <a:avLst/>
-          </a:prstGeom>
-          <a:ln w="25400">
+              <a:rPr sz="1250" b="1">
+                <a:solidFill>
+                  <a:srgbClr val="0C6D8C"/>
+                </a:solidFill>
+                <a:latin typeface="맑은 고딕"/>
+                <a:ea typeface="맑은 고딕"/>
+              </a:rPr>
+              <a:t>가설</a:t>
+            </a:r>
+          </a:p>
+        </p:txBody>
+      </p:sp>
+      <p:sp>
+        <p:nvSpPr>
+          <p:cNvPr id="12" name="TextBox 11"/>
+          <p:cNvSpPr txBox="1"/>
+          <p:nvPr/>
+        </p:nvSpPr>
+        <p:spPr>
+          <a:xfrm>
+            <a:off x="1874520" y="3026664"/>
+            <a:ext cx="3867912" cy="548640"/>
+          </a:xfrm>
+          <a:prstGeom prst="rect">
+            <a:avLst/>
+          </a:prstGeom>
+          <a:noFill/>
+        </p:spPr>
+        <p:txBody>
+          <a:bodyPr wrap="square" anchor="t" lIns="0" rIns="0" tIns="0" bIns="0">
+            <a:spAutoFit/>
+          </a:bodyPr>
+          <a:lstStyle/>
+          <a:p>
+            <a:pPr algn="l">
+              <a:lnSpc>
+                <a:spcPct val="125000"/>
+              </a:lnSpc>
+              <a:spcBef>
+                <a:spcPts val="0"/>
+              </a:spcBef>
+              <a:spcAft>
+                <a:spcPts val="0"/>
+              </a:spcAft>
+            </a:pPr>
+            <a:r>
+              <a:rPr sz="1400" b="0">
+                <a:solidFill>
+                  <a:srgbClr val="3A3F57"/>
+                </a:solidFill>
+                <a:latin typeface="맑은 고딕"/>
+                <a:ea typeface="맑은 고딕"/>
+              </a:rPr>
+              <a:t>측정·관리 데이터가 </a:t>
+            </a:r>
+            <a:r>
+              <a:rPr sz="1400" b="1">
+                <a:solidFill>
+                  <a:srgbClr val="171A2E"/>
+                </a:solidFill>
+                <a:latin typeface="맑은 고딕"/>
+                <a:ea typeface="맑은 고딕"/>
+              </a:rPr>
+              <a:t>한 흐름으로 이어지면</a:t>
+            </a:r>
+            <a:r>
+              <a:rPr sz="1400" b="0">
+                <a:solidFill>
+                  <a:srgbClr val="3A3F57"/>
+                </a:solidFill>
+                <a:latin typeface="맑은 고딕"/>
+                <a:ea typeface="맑은 고딕"/>
+              </a:rPr>
+              <a:t> 측정 지속·다음 행동 연결이 좋아진다</a:t>
+            </a:r>
+          </a:p>
+        </p:txBody>
+      </p:sp>
+      <p:sp>
+        <p:nvSpPr>
+          <p:cNvPr id="13" name="TextBox 12"/>
+          <p:cNvSpPr txBox="1"/>
+          <p:nvPr/>
+        </p:nvSpPr>
+        <p:spPr>
+          <a:xfrm>
+            <a:off x="941832" y="3538728"/>
+            <a:ext cx="868680" cy="457200"/>
+          </a:xfrm>
+          <a:prstGeom prst="rect">
+            <a:avLst/>
+          </a:prstGeom>
+          <a:noFill/>
+        </p:spPr>
+        <p:txBody>
+          <a:bodyPr wrap="square" anchor="t" lIns="0" rIns="0" tIns="0" bIns="0">
+            <a:spAutoFit/>
+          </a:bodyPr>
+          <a:lstStyle/>
+          <a:p>
+            <a:pPr algn="l">
+              <a:lnSpc>
+                <a:spcPct val="100000"/>
+              </a:lnSpc>
+              <a:spcBef>
+                <a:spcPts val="0"/>
+              </a:spcBef>
+              <a:spcAft>
+                <a:spcPts val="0"/>
+              </a:spcAft>
+            </a:pPr>
+            <a:r>
+              <a:rPr sz="1250" b="1">
+                <a:solidFill>
+                  <a:srgbClr val="0C6D8C"/>
+                </a:solidFill>
+                <a:latin typeface="맑은 고딕"/>
+                <a:ea typeface="맑은 고딕"/>
+              </a:rPr>
+              <a:t>근거</a:t>
+            </a:r>
+          </a:p>
+        </p:txBody>
+      </p:sp>
+      <p:sp>
+        <p:nvSpPr>
+          <p:cNvPr id="14" name="TextBox 13"/>
+          <p:cNvSpPr txBox="1"/>
+          <p:nvPr/>
+        </p:nvSpPr>
+        <p:spPr>
+          <a:xfrm>
+            <a:off x="1874520" y="3538728"/>
+            <a:ext cx="3867912" cy="548640"/>
+          </a:xfrm>
+          <a:prstGeom prst="rect">
+            <a:avLst/>
+          </a:prstGeom>
+          <a:noFill/>
+        </p:spPr>
+        <p:txBody>
+          <a:bodyPr wrap="square" anchor="t" lIns="0" rIns="0" tIns="0" bIns="0">
+            <a:spAutoFit/>
+          </a:bodyPr>
+          <a:lstStyle/>
+          <a:p>
+            <a:pPr algn="l">
+              <a:lnSpc>
+                <a:spcPct val="125000"/>
+              </a:lnSpc>
+              <a:spcBef>
+                <a:spcPts val="0"/>
+              </a:spcBef>
+              <a:spcAft>
+                <a:spcPts val="0"/>
+              </a:spcAft>
+            </a:pPr>
+            <a:r>
+              <a:rPr sz="1400" b="0">
+                <a:solidFill>
+                  <a:srgbClr val="3A3F57"/>
+                </a:solidFill>
+                <a:latin typeface="맑은 고딕"/>
+                <a:ea typeface="맑은 고딕"/>
+              </a:rPr>
+              <a:t>그룹은 모니터링·관리 접점(하이카디·케어센스에어 등)을 이미 확보 — </a:t>
+            </a:r>
+            <a:r>
+              <a:rPr sz="1400" b="1">
+                <a:solidFill>
+                  <a:srgbClr val="171A2E"/>
+                </a:solidFill>
+                <a:latin typeface="맑은 고딕"/>
+                <a:ea typeface="맑은 고딕"/>
+              </a:rPr>
+              <a:t>‘잇는 경험’은 빈자리</a:t>
+            </a:r>
+          </a:p>
+        </p:txBody>
+      </p:sp>
+      <p:sp>
+        <p:nvSpPr>
+          <p:cNvPr id="15" name="TextBox 14"/>
+          <p:cNvSpPr txBox="1"/>
+          <p:nvPr/>
+        </p:nvSpPr>
+        <p:spPr>
+          <a:xfrm>
+            <a:off x="941832" y="4050792"/>
+            <a:ext cx="868680" cy="457200"/>
+          </a:xfrm>
+          <a:prstGeom prst="rect">
+            <a:avLst/>
+          </a:prstGeom>
+          <a:noFill/>
+        </p:spPr>
+        <p:txBody>
+          <a:bodyPr wrap="square" anchor="t" lIns="0" rIns="0" tIns="0" bIns="0">
+            <a:spAutoFit/>
+          </a:bodyPr>
+          <a:lstStyle/>
+          <a:p>
+            <a:pPr algn="l">
+              <a:lnSpc>
+                <a:spcPct val="100000"/>
+              </a:lnSpc>
+              <a:spcBef>
+                <a:spcPts val="0"/>
+              </a:spcBef>
+              <a:spcAft>
+                <a:spcPts val="0"/>
+              </a:spcAft>
+            </a:pPr>
+            <a:r>
+              <a:rPr sz="1250" b="1">
+                <a:solidFill>
+                  <a:srgbClr val="0C6D8C"/>
+                </a:solidFill>
+                <a:latin typeface="맑은 고딕"/>
+                <a:ea typeface="맑은 고딕"/>
+              </a:rPr>
+              <a:t>검증</a:t>
+            </a:r>
+          </a:p>
+        </p:txBody>
+      </p:sp>
+      <p:sp>
+        <p:nvSpPr>
+          <p:cNvPr id="16" name="TextBox 15"/>
+          <p:cNvSpPr txBox="1"/>
+          <p:nvPr/>
+        </p:nvSpPr>
+        <p:spPr>
+          <a:xfrm>
+            <a:off x="1874520" y="4050792"/>
+            <a:ext cx="3867912" cy="548640"/>
+          </a:xfrm>
+          <a:prstGeom prst="rect">
+            <a:avLst/>
+          </a:prstGeom>
+          <a:noFill/>
+        </p:spPr>
+        <p:txBody>
+          <a:bodyPr wrap="square" anchor="t" lIns="0" rIns="0" tIns="0" bIns="0">
+            <a:spAutoFit/>
+          </a:bodyPr>
+          <a:lstStyle/>
+          <a:p>
+            <a:pPr algn="l">
+              <a:lnSpc>
+                <a:spcPct val="125000"/>
+              </a:lnSpc>
+              <a:spcBef>
+                <a:spcPts val="0"/>
+              </a:spcBef>
+              <a:spcAft>
+                <a:spcPts val="0"/>
+              </a:spcAft>
+            </a:pPr>
+            <a:r>
+              <a:rPr sz="1400" b="0">
+                <a:solidFill>
+                  <a:srgbClr val="3A3F57"/>
+                </a:solidFill>
+                <a:latin typeface="맑은 고딕"/>
+                <a:ea typeface="맑은 고딕"/>
+              </a:rPr>
+              <a:t>소수 사용자 대상 </a:t>
+            </a:r>
+            <a:r>
+              <a:rPr sz="1400" b="1">
+                <a:solidFill>
+                  <a:srgbClr val="171A2E"/>
+                </a:solidFill>
+                <a:latin typeface="맑은 고딕"/>
+                <a:ea typeface="맑은 고딕"/>
+              </a:rPr>
+              <a:t>얇은 연결 슬라이스</a:t>
+            </a:r>
+            <a:r>
+              <a:rPr sz="1400" b="0">
+                <a:solidFill>
+                  <a:srgbClr val="3A3F57"/>
+                </a:solidFill>
+                <a:latin typeface="맑은 고딕"/>
+                <a:ea typeface="맑은 고딕"/>
+              </a:rPr>
+              <a:t> 프로토타입으로 실사용·이탈 관측</a:t>
+            </a:r>
+          </a:p>
+        </p:txBody>
+      </p:sp>
+      <p:sp>
+        <p:nvSpPr>
+          <p:cNvPr id="17" name="Rectangle 16"/>
+          <p:cNvSpPr/>
+          <p:nvPr/>
+        </p:nvSpPr>
+        <p:spPr>
+          <a:xfrm>
+            <a:off x="740664" y="4544568"/>
+            <a:ext cx="5221224" cy="521207"/>
+          </a:xfrm>
+          <a:prstGeom prst="rect">
+            <a:avLst/>
+          </a:prstGeom>
+          <a:solidFill>
+            <a:srgbClr val="E7F4F9"/>
+          </a:solidFill>
+          <a:ln>
+            <a:noFill/>
+          </a:ln>
+          <a:effectLst/>
+        </p:spPr>
+        <p:style>
+          <a:lnRef idx="1">
+            <a:schemeClr val="accent1"/>
+          </a:lnRef>
+          <a:fillRef idx="3">
+            <a:schemeClr val="accent1"/>
+          </a:fillRef>
+          <a:effectRef idx="2">
+            <a:schemeClr val="accent1"/>
+          </a:effectRef>
+          <a:fontRef idx="minor">
+            <a:schemeClr val="lt1"/>
+          </a:fontRef>
+        </p:style>
+        <p:txBody>
+          <a:bodyPr rtlCol="0" anchor="ctr"/>
+          <a:lstStyle/>
+          <a:p>
+            <a:pPr algn="ctr"/>
+          </a:p>
+        </p:txBody>
+      </p:sp>
+      <p:sp>
+        <p:nvSpPr>
+          <p:cNvPr id="18" name="TextBox 17"/>
+          <p:cNvSpPr txBox="1"/>
+          <p:nvPr/>
+        </p:nvSpPr>
+        <p:spPr>
+          <a:xfrm>
+            <a:off x="941832" y="4617720"/>
+            <a:ext cx="868680" cy="411480"/>
+          </a:xfrm>
+          <a:prstGeom prst="rect">
+            <a:avLst/>
+          </a:prstGeom>
+          <a:noFill/>
+        </p:spPr>
+        <p:txBody>
+          <a:bodyPr wrap="square" anchor="t" lIns="0" rIns="0" tIns="0" bIns="0">
+            <a:spAutoFit/>
+          </a:bodyPr>
+          <a:lstStyle/>
+          <a:p>
+            <a:pPr algn="l">
+              <a:lnSpc>
+                <a:spcPct val="100000"/>
+              </a:lnSpc>
+              <a:spcBef>
+                <a:spcPts val="0"/>
+              </a:spcBef>
+              <a:spcAft>
+                <a:spcPts val="0"/>
+              </a:spcAft>
+            </a:pPr>
+            <a:r>
+              <a:rPr sz="1250" b="1">
+                <a:solidFill>
+                  <a:srgbClr val="0C6D8C"/>
+                </a:solidFill>
+                <a:latin typeface="맑은 고딕"/>
+                <a:ea typeface="맑은 고딕"/>
+              </a:rPr>
+              <a:t>성공·중단</a:t>
+            </a:r>
+          </a:p>
+        </p:txBody>
+      </p:sp>
+      <p:sp>
+        <p:nvSpPr>
+          <p:cNvPr id="19" name="TextBox 18"/>
+          <p:cNvSpPr txBox="1"/>
+          <p:nvPr/>
+        </p:nvSpPr>
+        <p:spPr>
+          <a:xfrm>
+            <a:off x="1874520" y="4608576"/>
+            <a:ext cx="3913632" cy="457200"/>
+          </a:xfrm>
+          <a:prstGeom prst="rect">
+            <a:avLst/>
+          </a:prstGeom>
+          <a:noFill/>
+        </p:spPr>
+        <p:txBody>
+          <a:bodyPr wrap="square" anchor="t" lIns="0" rIns="0" tIns="0" bIns="0">
+            <a:spAutoFit/>
+          </a:bodyPr>
+          <a:lstStyle/>
+          <a:p>
+            <a:pPr algn="l">
+              <a:lnSpc>
+                <a:spcPct val="120000"/>
+              </a:lnSpc>
+              <a:spcBef>
+                <a:spcPts val="0"/>
+              </a:spcBef>
+              <a:spcAft>
+                <a:spcPts val="0"/>
+              </a:spcAft>
+            </a:pPr>
+            <a:r>
+              <a:rPr sz="1350" b="1">
+                <a:solidFill>
+                  <a:srgbClr val="0C6D8C"/>
+                </a:solidFill>
+                <a:latin typeface="맑은 고딕"/>
+                <a:ea typeface="맑은 고딕"/>
+              </a:rPr>
+              <a:t>실사용(채택) + 안전 인시던트 0 + 동의·규제 확인 통과</a:t>
+            </a:r>
+            <a:r>
+              <a:rPr sz="1350" b="0">
+                <a:solidFill>
+                  <a:srgbClr val="171A2E"/>
+                </a:solidFill>
+                <a:latin typeface="맑은 고딕"/>
+                <a:ea typeface="맑은 고딕"/>
+              </a:rPr>
+              <a:t> → 확장 / 미달 → 축소·보류</a:t>
+            </a:r>
+          </a:p>
+        </p:txBody>
+      </p:sp>
+      <p:sp>
+        <p:nvSpPr>
+          <p:cNvPr id="20" name="Rounded Rectangle 19"/>
+          <p:cNvSpPr/>
+          <p:nvPr/>
+        </p:nvSpPr>
+        <p:spPr>
+          <a:xfrm>
+            <a:off x="6144768" y="2057400"/>
+            <a:ext cx="5330952" cy="3063240"/>
+          </a:xfrm>
+          <a:prstGeom prst="roundRect">
+            <a:avLst>
+              <a:gd name="adj" fmla="val 10000"/>
+            </a:avLst>
+          </a:prstGeom>
+          <a:solidFill>
+            <a:srgbClr val="FFFFFF"/>
+          </a:solidFill>
+          <a:ln w="15240">
             <a:solidFill>
-              <a:srgbClr val="2F7F9C"/>
+              <a:srgbClr val="E5E8F0"/>
             </a:solidFill>
           </a:ln>
           <a:effectLst/>
         </p:spPr>
         <p:style>
-          <a:lnRef idx="2">
+          <a:lnRef idx="1">
             <a:schemeClr val="accent1"/>
           </a:lnRef>
-          <a:fillRef idx="0">
+          <a:fillRef idx="3">
             <a:schemeClr val="accent1"/>
           </a:fillRef>
-          <a:effectRef idx="1">
+          <a:effectRef idx="2">
             <a:schemeClr val="accent1"/>
           </a:effectRef>
           <a:fontRef idx="minor">
-            <a:schemeClr val="tx1"/>
+            <a:schemeClr val="lt1"/>
           </a:fontRef>
         </p:style>
-      </p:cxnSp>
-      <p:sp>
-        <p:nvSpPr>
-          <p:cNvPr id="6" name="TextBox 5"/>
+        <p:txBody>
+          <a:bodyPr rtlCol="0" anchor="ctr"/>
+          <a:lstStyle/>
+          <a:p>
+            <a:pPr algn="ctr"/>
+          </a:p>
+        </p:txBody>
+      </p:sp>
+      <p:sp>
+        <p:nvSpPr>
+          <p:cNvPr id="21" name="Rectangle 20"/>
+          <p:cNvSpPr/>
+          <p:nvPr/>
+        </p:nvSpPr>
+        <p:spPr>
+          <a:xfrm>
+            <a:off x="6144768" y="2057400"/>
+            <a:ext cx="5330952" cy="841248"/>
+          </a:xfrm>
+          <a:prstGeom prst="rect">
+            <a:avLst/>
+          </a:prstGeom>
+          <a:solidFill>
+            <a:srgbClr val="141A33"/>
+          </a:solidFill>
+          <a:ln>
+            <a:noFill/>
+          </a:ln>
+          <a:effectLst/>
+        </p:spPr>
+        <p:style>
+          <a:lnRef idx="1">
+            <a:schemeClr val="accent1"/>
+          </a:lnRef>
+          <a:fillRef idx="3">
+            <a:schemeClr val="accent1"/>
+          </a:fillRef>
+          <a:effectRef idx="2">
+            <a:schemeClr val="accent1"/>
+          </a:effectRef>
+          <a:fontRef idx="minor">
+            <a:schemeClr val="lt1"/>
+          </a:fontRef>
+        </p:style>
+        <p:txBody>
+          <a:bodyPr rtlCol="0" anchor="ctr"/>
+          <a:lstStyle/>
+          <a:p>
+            <a:pPr algn="ctr"/>
+          </a:p>
+        </p:txBody>
+      </p:sp>
+      <p:sp>
+        <p:nvSpPr>
+          <p:cNvPr id="22" name="TextBox 21"/>
           <p:cNvSpPr txBox="1"/>
           <p:nvPr/>
         </p:nvSpPr>
         <p:spPr>
           <a:xfrm>
-            <a:off x="685800" y="2011680"/>
-            <a:ext cx="10789920" cy="1554480"/>
+            <a:off x="6400800" y="2185416"/>
+            <a:ext cx="4873752" cy="640080"/>
           </a:xfrm>
           <a:prstGeom prst="rect">
             <a:avLst/>
@@ -16637,71 +18260,61 @@
           <a:p>
             <a:pPr algn="l">
               <a:lnSpc>
-                <a:spcPct val="114000"/>
-              </a:lnSpc>
-              <a:spcBef>
-                <a:spcPts val="0"/>
-              </a:spcBef>
-              <a:spcAft>
-                <a:spcPts val="0"/>
-              </a:spcAft>
-            </a:pPr>
-            <a:r>
-              <a:rPr sz="4000" b="1">
+                <a:spcPct val="100000"/>
+              </a:lnSpc>
+              <a:spcBef>
+                <a:spcPts val="0"/>
+              </a:spcBef>
+              <a:spcAft>
+                <a:spcPts val="0"/>
+              </a:spcAft>
+            </a:pPr>
+            <a:r>
+              <a:rPr sz="1250" b="1" spc="40">
+                <a:solidFill>
+                  <a:srgbClr val="5FD0EE"/>
+                </a:solidFill>
+                <a:latin typeface="맑은 고딕"/>
+                <a:ea typeface="맑은 고딕"/>
+              </a:rPr>
+              <a:t>가설 B · 접근성 (원무 경험 이식)</a:t>
+            </a:r>
+          </a:p>
+          <a:p>
+            <a:pPr algn="l">
+              <a:lnSpc>
+                <a:spcPct val="120000"/>
+              </a:lnSpc>
+              <a:spcBef>
+                <a:spcPts val="400"/>
+              </a:spcBef>
+              <a:spcAft>
+                <a:spcPts val="0"/>
+              </a:spcAft>
+            </a:pPr>
+            <a:r>
+              <a:rPr sz="1650" b="1">
                 <a:solidFill>
                   <a:srgbClr val="FFFFFF"/>
                 </a:solidFill>
                 <a:latin typeface="맑은 고딕"/>
                 <a:ea typeface="맑은 고딕"/>
               </a:rPr>
-              <a:t>DAI의 사업 과제를</a:t>
-            </a:r>
-          </a:p>
-          <a:p>
-            <a:pPr algn="l">
-              <a:lnSpc>
-                <a:spcPct val="114000"/>
-              </a:lnSpc>
-              <a:spcBef>
-                <a:spcPts val="0"/>
-              </a:spcBef>
-              <a:spcAft>
-                <a:spcPts val="0"/>
-              </a:spcAft>
-            </a:pPr>
-            <a:r>
-              <a:rPr sz="4000" b="1">
-                <a:solidFill>
-                  <a:srgbClr val="5FD0EE"/>
-                </a:solidFill>
-                <a:latin typeface="맑은 고딕"/>
-                <a:ea typeface="맑은 고딕"/>
-              </a:rPr>
-              <a:t>제품과 운영</a:t>
-            </a:r>
-            <a:r>
-              <a:rPr sz="4000" b="1">
-                <a:solidFill>
-                  <a:srgbClr val="FFFFFF"/>
-                </a:solidFill>
-                <a:latin typeface="맑은 고딕"/>
-                <a:ea typeface="맑은 고딕"/>
-              </a:rPr>
-              <a:t>으로 구체화하겠습니다</a:t>
-            </a:r>
-          </a:p>
-        </p:txBody>
-      </p:sp>
-      <p:sp>
-        <p:nvSpPr>
-          <p:cNvPr id="7" name="TextBox 6"/>
+              <a:t>예약~동의~결과 확인의  마찰을 줄여 등록·재사용을 높인다</a:t>
+            </a:r>
+          </a:p>
+        </p:txBody>
+      </p:sp>
+      <p:sp>
+        <p:nvSpPr>
+          <p:cNvPr id="23" name="TextBox 22"/>
           <p:cNvSpPr txBox="1"/>
           <p:nvPr/>
         </p:nvSpPr>
         <p:spPr>
           <a:xfrm>
-            <a:off x="713232" y="3977639"/>
-            <a:ext cx="3200400" cy="320040"/>
+            <a:off x="6400800" y="3026664"/>
+            <a:ext cx="868680" cy="457200"/>
           </a:xfrm>
           <a:prstGeom prst="rect">
             <a:avLst/>
@@ -16726,28 +18339,28 @@
               </a:spcAft>
             </a:pPr>
             <a:r>
-              <a:rPr sz="1300" b="1" spc="50">
-                <a:solidFill>
-                  <a:srgbClr val="5FD0EE"/>
-                </a:solidFill>
-                <a:latin typeface="맑은 고딕"/>
-                <a:ea typeface="맑은 고딕"/>
-              </a:rPr>
-              <a:t>01 · 전환</a:t>
-            </a:r>
-          </a:p>
-        </p:txBody>
-      </p:sp>
-      <p:sp>
-        <p:nvSpPr>
-          <p:cNvPr id="8" name="TextBox 7"/>
+              <a:rPr sz="1250" b="1">
+                <a:solidFill>
+                  <a:srgbClr val="0C6D8C"/>
+                </a:solidFill>
+                <a:latin typeface="맑은 고딕"/>
+                <a:ea typeface="맑은 고딕"/>
+              </a:rPr>
+              <a:t>가설</a:t>
+            </a:r>
+          </a:p>
+        </p:txBody>
+      </p:sp>
+      <p:sp>
+        <p:nvSpPr>
+          <p:cNvPr id="24" name="TextBox 23"/>
           <p:cNvSpPr txBox="1"/>
           <p:nvPr/>
         </p:nvSpPr>
         <p:spPr>
           <a:xfrm>
-            <a:off x="713232" y="4343400"/>
-            <a:ext cx="3291840" cy="822960"/>
+            <a:off x="7333488" y="3026664"/>
+            <a:ext cx="3867912" cy="548640"/>
           </a:xfrm>
           <a:prstGeom prst="rect">
             <a:avLst/>
@@ -16762,74 +18375,58 @@
           <a:p>
             <a:pPr algn="l">
               <a:lnSpc>
-                <a:spcPct val="130000"/>
-              </a:lnSpc>
-              <a:spcBef>
-                <a:spcPts val="0"/>
-              </a:spcBef>
-              <a:spcAft>
-                <a:spcPts val="0"/>
-              </a:spcAft>
-            </a:pPr>
-            <a:r>
-              <a:rPr sz="1700" b="1">
-                <a:solidFill>
-                  <a:srgbClr val="E7EBF6"/>
-                </a:solidFill>
-                <a:latin typeface="맑은 고딕"/>
-                <a:ea typeface="맑은 고딕"/>
-              </a:rPr>
-              <a:t>사용자 행동과 사업 전환을 함께 본 경험</a:t>
-            </a:r>
-          </a:p>
-        </p:txBody>
-      </p:sp>
-      <p:cxnSp>
-        <p:nvCxnSpPr>
-          <p:cNvPr id="9" name="Connector 8"/>
-          <p:cNvCxnSpPr/>
-          <p:nvPr/>
-        </p:nvCxnSpPr>
-        <p:spPr>
-          <a:xfrm>
-            <a:off x="4142232" y="3977639"/>
-            <a:ext cx="0" cy="868680"/>
-          </a:xfrm>
-          <a:prstGeom prst="bentConnector3">
-            <a:avLst/>
-          </a:prstGeom>
-          <a:ln w="12700">
-            <a:solidFill>
-              <a:srgbClr val="333B5E"/>
-            </a:solidFill>
-          </a:ln>
-          <a:effectLst/>
-        </p:spPr>
-        <p:style>
-          <a:lnRef idx="2">
-            <a:schemeClr val="accent1"/>
-          </a:lnRef>
-          <a:fillRef idx="0">
-            <a:schemeClr val="accent1"/>
-          </a:fillRef>
-          <a:effectRef idx="1">
-            <a:schemeClr val="accent1"/>
-          </a:effectRef>
-          <a:fontRef idx="minor">
-            <a:schemeClr val="tx1"/>
-          </a:fontRef>
-        </p:style>
-      </p:cxnSp>
-      <p:sp>
-        <p:nvSpPr>
-          <p:cNvPr id="10" name="TextBox 9"/>
+                <a:spcPct val="125000"/>
+              </a:lnSpc>
+              <a:spcBef>
+                <a:spcPts val="0"/>
+              </a:spcBef>
+              <a:spcAft>
+                <a:spcPts val="0"/>
+              </a:spcAft>
+            </a:pPr>
+            <a:r>
+              <a:rPr sz="1400" b="0">
+                <a:solidFill>
+                  <a:srgbClr val="3A3F57"/>
+                </a:solidFill>
+                <a:latin typeface="맑은 고딕"/>
+                <a:ea typeface="맑은 고딕"/>
+              </a:rPr>
+              <a:t>등록·동의·조회의 </a:t>
+            </a:r>
+            <a:r>
+              <a:rPr sz="1400" b="1">
+                <a:solidFill>
+                  <a:srgbClr val="171A2E"/>
+                </a:solidFill>
+                <a:latin typeface="맑은 고딕"/>
+                <a:ea typeface="맑은 고딕"/>
+              </a:rPr>
+              <a:t>마찰을 줄이면</a:t>
+            </a:r>
+            <a:r>
+              <a:rPr sz="1400" b="0">
+                <a:solidFill>
+                  <a:srgbClr val="3A3F57"/>
+                </a:solidFill>
+                <a:latin typeface="맑은 고딕"/>
+                <a:ea typeface="맑은 고딕"/>
+              </a:rPr>
+              <a:t> 디지털 헬스 접점의 등록·재사용률이 오른다</a:t>
+            </a:r>
+          </a:p>
+        </p:txBody>
+      </p:sp>
+      <p:sp>
+        <p:nvSpPr>
+          <p:cNvPr id="25" name="TextBox 24"/>
           <p:cNvSpPr txBox="1"/>
           <p:nvPr/>
         </p:nvSpPr>
         <p:spPr>
           <a:xfrm>
-            <a:off x="4325112" y="3977639"/>
-            <a:ext cx="3200400" cy="320040"/>
+            <a:off x="6400800" y="3538728"/>
+            <a:ext cx="868680" cy="457200"/>
           </a:xfrm>
           <a:prstGeom prst="rect">
             <a:avLst/>
@@ -16854,28 +18451,28 @@
               </a:spcAft>
             </a:pPr>
             <a:r>
-              <a:rPr sz="1300" b="1" spc="50">
-                <a:solidFill>
-                  <a:srgbClr val="5FD0EE"/>
-                </a:solidFill>
-                <a:latin typeface="맑은 고딕"/>
-                <a:ea typeface="맑은 고딕"/>
-              </a:rPr>
-              <a:t>02 · 연동</a:t>
-            </a:r>
-          </a:p>
-        </p:txBody>
-      </p:sp>
-      <p:sp>
-        <p:nvSpPr>
-          <p:cNvPr id="11" name="TextBox 10"/>
+              <a:rPr sz="1250" b="1">
+                <a:solidFill>
+                  <a:srgbClr val="0C6D8C"/>
+                </a:solidFill>
+                <a:latin typeface="맑은 고딕"/>
+                <a:ea typeface="맑은 고딕"/>
+              </a:rPr>
+              <a:t>근거</a:t>
+            </a:r>
+          </a:p>
+        </p:txBody>
+      </p:sp>
+      <p:sp>
+        <p:nvSpPr>
+          <p:cNvPr id="26" name="TextBox 25"/>
           <p:cNvSpPr txBox="1"/>
           <p:nvPr/>
         </p:nvSpPr>
         <p:spPr>
           <a:xfrm>
-            <a:off x="4325112" y="4343400"/>
-            <a:ext cx="3291840" cy="822960"/>
+            <a:off x="7333488" y="3538728"/>
+            <a:ext cx="3867912" cy="548640"/>
           </a:xfrm>
           <a:prstGeom prst="rect">
             <a:avLst/>
@@ -16890,74 +18487,58 @@
           <a:p>
             <a:pPr algn="l">
               <a:lnSpc>
-                <a:spcPct val="130000"/>
-              </a:lnSpc>
-              <a:spcBef>
-                <a:spcPts val="0"/>
-              </a:spcBef>
-              <a:spcAft>
-                <a:spcPts val="0"/>
-              </a:spcAft>
-            </a:pPr>
-            <a:r>
-              <a:rPr sz="1700" b="1">
-                <a:solidFill>
-                  <a:srgbClr val="E7EBF6"/>
-                </a:solidFill>
-                <a:latin typeface="맑은 고딕"/>
-                <a:ea typeface="맑은 고딕"/>
-              </a:rPr>
-              <a:t>현장 업무와 외부 시스템을 연결한 경험</a:t>
-            </a:r>
-          </a:p>
-        </p:txBody>
-      </p:sp>
-      <p:cxnSp>
-        <p:nvCxnSpPr>
-          <p:cNvPr id="12" name="Connector 11"/>
-          <p:cNvCxnSpPr/>
-          <p:nvPr/>
-        </p:nvCxnSpPr>
-        <p:spPr>
-          <a:xfrm>
-            <a:off x="7754112" y="3977639"/>
-            <a:ext cx="0" cy="868680"/>
-          </a:xfrm>
-          <a:prstGeom prst="bentConnector3">
-            <a:avLst/>
-          </a:prstGeom>
-          <a:ln w="12700">
-            <a:solidFill>
-              <a:srgbClr val="333B5E"/>
-            </a:solidFill>
-          </a:ln>
-          <a:effectLst/>
-        </p:spPr>
-        <p:style>
-          <a:lnRef idx="2">
-            <a:schemeClr val="accent1"/>
-          </a:lnRef>
-          <a:fillRef idx="0">
-            <a:schemeClr val="accent1"/>
-          </a:fillRef>
-          <a:effectRef idx="1">
-            <a:schemeClr val="accent1"/>
-          </a:effectRef>
-          <a:fontRef idx="minor">
-            <a:schemeClr val="tx1"/>
-          </a:fontRef>
-        </p:style>
-      </p:cxnSp>
-      <p:sp>
-        <p:nvSpPr>
-          <p:cNvPr id="13" name="TextBox 12"/>
+                <a:spcPct val="125000"/>
+              </a:lnSpc>
+              <a:spcBef>
+                <a:spcPts val="0"/>
+              </a:spcBef>
+              <a:spcAft>
+                <a:spcPts val="0"/>
+              </a:spcAft>
+            </a:pPr>
+            <a:r>
+              <a:rPr sz="1400" b="0">
+                <a:solidFill>
+                  <a:srgbClr val="3A3F57"/>
+                </a:solidFill>
+                <a:latin typeface="맑은 고딕"/>
+                <a:ea typeface="맑은 고딕"/>
+              </a:rPr>
+              <a:t>EMR 연동 원무를 </a:t>
+            </a:r>
+            <a:r>
+              <a:rPr sz="1400" b="1">
+                <a:solidFill>
+                  <a:srgbClr val="171A2E"/>
+                </a:solidFill>
+                <a:latin typeface="맑은 고딕"/>
+                <a:ea typeface="맑은 고딕"/>
+              </a:rPr>
+              <a:t>서비스화한 제 경험</a:t>
+            </a:r>
+            <a:r>
+              <a:rPr sz="1400" b="0">
+                <a:solidFill>
+                  <a:srgbClr val="3A3F57"/>
+                </a:solidFill>
+                <a:latin typeface="맑은 고딕"/>
+                <a:ea typeface="맑은 고딕"/>
+              </a:rPr>
+              <a:t>이 그대로 붙는 지점</a:t>
+            </a:r>
+          </a:p>
+        </p:txBody>
+      </p:sp>
+      <p:sp>
+        <p:nvSpPr>
+          <p:cNvPr id="27" name="TextBox 26"/>
           <p:cNvSpPr txBox="1"/>
           <p:nvPr/>
         </p:nvSpPr>
         <p:spPr>
           <a:xfrm>
-            <a:off x="7936992" y="3977639"/>
-            <a:ext cx="3200400" cy="320040"/>
+            <a:off x="6400800" y="4050792"/>
+            <a:ext cx="868680" cy="457200"/>
           </a:xfrm>
           <a:prstGeom prst="rect">
             <a:avLst/>
@@ -16982,28 +18563,28 @@
               </a:spcAft>
             </a:pPr>
             <a:r>
-              <a:rPr sz="1300" b="1" spc="50">
-                <a:solidFill>
-                  <a:srgbClr val="5FD0EE"/>
-                </a:solidFill>
-                <a:latin typeface="맑은 고딕"/>
-                <a:ea typeface="맑은 고딕"/>
-              </a:rPr>
-              <a:t>03 · 실행</a:t>
-            </a:r>
-          </a:p>
-        </p:txBody>
-      </p:sp>
-      <p:sp>
-        <p:nvSpPr>
-          <p:cNvPr id="14" name="TextBox 13"/>
+              <a:rPr sz="1250" b="1">
+                <a:solidFill>
+                  <a:srgbClr val="0C6D8C"/>
+                </a:solidFill>
+                <a:latin typeface="맑은 고딕"/>
+                <a:ea typeface="맑은 고딕"/>
+              </a:rPr>
+              <a:t>검증</a:t>
+            </a:r>
+          </a:p>
+        </p:txBody>
+      </p:sp>
+      <p:sp>
+        <p:nvSpPr>
+          <p:cNvPr id="28" name="TextBox 27"/>
           <p:cNvSpPr txBox="1"/>
           <p:nvPr/>
         </p:nvSpPr>
         <p:spPr>
           <a:xfrm>
-            <a:off x="7936992" y="4343400"/>
-            <a:ext cx="3291840" cy="822960"/>
+            <a:off x="7333488" y="4050792"/>
+            <a:ext cx="3867912" cy="548640"/>
           </a:xfrm>
           <a:prstGeom prst="rect">
             <a:avLst/>
@@ -17018,38 +18599,102 @@
           <a:p>
             <a:pPr algn="l">
               <a:lnSpc>
-                <a:spcPct val="130000"/>
-              </a:lnSpc>
-              <a:spcBef>
-                <a:spcPts val="0"/>
-              </a:spcBef>
-              <a:spcAft>
-                <a:spcPts val="0"/>
-              </a:spcAft>
-            </a:pPr>
-            <a:r>
-              <a:rPr sz="1700" b="1">
-                <a:solidFill>
-                  <a:srgbClr val="E7EBF6"/>
-                </a:solidFill>
-                <a:latin typeface="맑은 고딕"/>
-                <a:ea typeface="맑은 고딕"/>
-              </a:rPr>
-              <a:t>우선순위를 정하고 여러 팀의 실행을 이끈 경험</a:t>
-            </a:r>
-          </a:p>
-        </p:txBody>
-      </p:sp>
-      <p:sp>
-        <p:nvSpPr>
-          <p:cNvPr id="15" name="TextBox 14"/>
+                <a:spcPct val="125000"/>
+              </a:lnSpc>
+              <a:spcBef>
+                <a:spcPts val="0"/>
+              </a:spcBef>
+              <a:spcAft>
+                <a:spcPts val="0"/>
+              </a:spcAft>
+            </a:pPr>
+            <a:r>
+              <a:rPr sz="1400" b="0">
+                <a:solidFill>
+                  <a:srgbClr val="3A3F57"/>
+                </a:solidFill>
+                <a:latin typeface="맑은 고딕"/>
+                <a:ea typeface="맑은 고딕"/>
+              </a:rPr>
+              <a:t>한 개 접점에서 </a:t>
+            </a:r>
+            <a:r>
+              <a:rPr sz="1400" b="1">
+                <a:solidFill>
+                  <a:srgbClr val="171A2E"/>
+                </a:solidFill>
+                <a:latin typeface="맑은 고딕"/>
+                <a:ea typeface="맑은 고딕"/>
+              </a:rPr>
+              <a:t>등록·동의·조회 플로우 개선안</a:t>
+            </a:r>
+            <a:r>
+              <a:rPr sz="1400" b="0">
+                <a:solidFill>
+                  <a:srgbClr val="3A3F57"/>
+                </a:solidFill>
+                <a:latin typeface="맑은 고딕"/>
+                <a:ea typeface="맑은 고딕"/>
+              </a:rPr>
+              <a:t>을 실증</a:t>
+            </a:r>
+          </a:p>
+        </p:txBody>
+      </p:sp>
+      <p:sp>
+        <p:nvSpPr>
+          <p:cNvPr id="29" name="Rectangle 28"/>
+          <p:cNvSpPr/>
+          <p:nvPr/>
+        </p:nvSpPr>
+        <p:spPr>
+          <a:xfrm>
+            <a:off x="6199632" y="4544568"/>
+            <a:ext cx="5221224" cy="521207"/>
+          </a:xfrm>
+          <a:prstGeom prst="rect">
+            <a:avLst/>
+          </a:prstGeom>
+          <a:solidFill>
+            <a:srgbClr val="E7F4F9"/>
+          </a:solidFill>
+          <a:ln>
+            <a:noFill/>
+          </a:ln>
+          <a:effectLst/>
+        </p:spPr>
+        <p:style>
+          <a:lnRef idx="1">
+            <a:schemeClr val="accent1"/>
+          </a:lnRef>
+          <a:fillRef idx="3">
+            <a:schemeClr val="accent1"/>
+          </a:fillRef>
+          <a:effectRef idx="2">
+            <a:schemeClr val="accent1"/>
+          </a:effectRef>
+          <a:fontRef idx="minor">
+            <a:schemeClr val="lt1"/>
+          </a:fontRef>
+        </p:style>
+        <p:txBody>
+          <a:bodyPr rtlCol="0" anchor="ctr"/>
+          <a:lstStyle/>
+          <a:p>
+            <a:pPr algn="ctr"/>
+          </a:p>
+        </p:txBody>
+      </p:sp>
+      <p:sp>
+        <p:nvSpPr>
+          <p:cNvPr id="30" name="TextBox 29"/>
           <p:cNvSpPr txBox="1"/>
           <p:nvPr/>
         </p:nvSpPr>
         <p:spPr>
           <a:xfrm>
-            <a:off x="713232" y="5349240"/>
-            <a:ext cx="10698480" cy="822960"/>
+            <a:off x="6400800" y="4617720"/>
+            <a:ext cx="868680" cy="411480"/>
           </a:xfrm>
           <a:prstGeom prst="rect">
             <a:avLst/>
@@ -17064,58 +18709,38 @@
           <a:p>
             <a:pPr algn="l">
               <a:lnSpc>
-                <a:spcPct val="130000"/>
-              </a:lnSpc>
-              <a:spcBef>
-                <a:spcPts val="0"/>
-              </a:spcBef>
-              <a:spcAft>
-                <a:spcPts val="0"/>
-              </a:spcAft>
-            </a:pPr>
-            <a:r>
-              <a:rPr sz="2200" b="0">
-                <a:solidFill>
-                  <a:srgbClr val="C7CEE4"/>
-                </a:solidFill>
-                <a:latin typeface="맑은 고딕"/>
-                <a:ea typeface="맑은 고딕"/>
-              </a:rPr>
-              <a:t>필요한 전문성과 협업하며, </a:t>
-            </a:r>
-            <a:r>
-              <a:rPr sz="2200" b="1">
-                <a:solidFill>
-                  <a:srgbClr val="FFFFFF"/>
-                </a:solidFill>
-                <a:latin typeface="맑은 고딕"/>
-                <a:ea typeface="맑은 고딕"/>
-              </a:rPr>
-              <a:t>판단의 근거와 실행 결과를 끝까지 설명</a:t>
-            </a:r>
-            <a:r>
-              <a:rPr sz="2200" b="0">
-                <a:solidFill>
-                  <a:srgbClr val="C7CEE4"/>
-                </a:solidFill>
-                <a:latin typeface="맑은 고딕"/>
-                <a:ea typeface="맑은 고딕"/>
-              </a:rPr>
-              <a:t>하는 팀장이 되겠습니다.</a:t>
-            </a:r>
-          </a:p>
-        </p:txBody>
-      </p:sp>
-      <p:sp>
-        <p:nvSpPr>
-          <p:cNvPr id="16" name="TextBox 15"/>
+                <a:spcPct val="100000"/>
+              </a:lnSpc>
+              <a:spcBef>
+                <a:spcPts val="0"/>
+              </a:spcBef>
+              <a:spcAft>
+                <a:spcPts val="0"/>
+              </a:spcAft>
+            </a:pPr>
+            <a:r>
+              <a:rPr sz="1250" b="1">
+                <a:solidFill>
+                  <a:srgbClr val="0C6D8C"/>
+                </a:solidFill>
+                <a:latin typeface="맑은 고딕"/>
+                <a:ea typeface="맑은 고딕"/>
+              </a:rPr>
+              <a:t>성공·중단</a:t>
+            </a:r>
+          </a:p>
+        </p:txBody>
+      </p:sp>
+      <p:sp>
+        <p:nvSpPr>
+          <p:cNvPr id="31" name="TextBox 30"/>
           <p:cNvSpPr txBox="1"/>
           <p:nvPr/>
         </p:nvSpPr>
         <p:spPr>
           <a:xfrm>
-            <a:off x="685800" y="6382512"/>
-            <a:ext cx="8778240" cy="384048"/>
+            <a:off x="7333488" y="4608576"/>
+            <a:ext cx="3913632" cy="457200"/>
           </a:xfrm>
           <a:prstGeom prst="rect">
             <a:avLst/>
@@ -17130,38 +18755,192 @@
           <a:p>
             <a:pPr algn="l">
               <a:lnSpc>
-                <a:spcPct val="125000"/>
-              </a:lnSpc>
-              <a:spcBef>
-                <a:spcPts val="0"/>
-              </a:spcBef>
-              <a:spcAft>
-                <a:spcPts val="0"/>
-              </a:spcAft>
-            </a:pPr>
-            <a:r>
-              <a:rPr sz="1050" b="0">
-                <a:solidFill>
-                  <a:srgbClr val="7F89AB"/>
-                </a:solidFill>
-                <a:latin typeface="맑은 고딕"/>
-                <a:ea typeface="맑은 고딕"/>
-              </a:rPr>
-              <a:t>감사합니다. 질문 부탁드립니다.  ·  정치성</a:t>
-            </a:r>
-          </a:p>
-        </p:txBody>
-      </p:sp>
-      <p:sp>
-        <p:nvSpPr>
-          <p:cNvPr id="17" name="TextBox 16"/>
+                <a:spcPct val="120000"/>
+              </a:lnSpc>
+              <a:spcBef>
+                <a:spcPts val="0"/>
+              </a:spcBef>
+              <a:spcAft>
+                <a:spcPts val="0"/>
+              </a:spcAft>
+            </a:pPr>
+            <a:r>
+              <a:rPr sz="1350" b="1">
+                <a:solidFill>
+                  <a:srgbClr val="0C6D8C"/>
+                </a:solidFill>
+                <a:latin typeface="맑은 고딕"/>
+                <a:ea typeface="맑은 고딕"/>
+              </a:rPr>
+              <a:t>등록 완료율·재사용 관측</a:t>
+            </a:r>
+            <a:r>
+              <a:rPr sz="1350" b="0">
+                <a:solidFill>
+                  <a:srgbClr val="171A2E"/>
+                </a:solidFill>
+                <a:latin typeface="맑은 고딕"/>
+                <a:ea typeface="맑은 고딕"/>
+              </a:rPr>
+              <a:t> → 공통화 가치가 확인되면 확대</a:t>
+            </a:r>
+          </a:p>
+        </p:txBody>
+      </p:sp>
+      <p:sp>
+        <p:nvSpPr>
+          <p:cNvPr id="32" name="Rounded Rectangle 31"/>
+          <p:cNvSpPr/>
+          <p:nvPr/>
+        </p:nvSpPr>
+        <p:spPr>
+          <a:xfrm>
+            <a:off x="685800" y="5257800"/>
+            <a:ext cx="10817352" cy="713232"/>
+          </a:xfrm>
+          <a:prstGeom prst="roundRect">
+            <a:avLst>
+              <a:gd name="adj" fmla="val 10000"/>
+            </a:avLst>
+          </a:prstGeom>
+          <a:solidFill>
+            <a:srgbClr val="F5F7FB"/>
+          </a:solidFill>
+          <a:ln>
+            <a:noFill/>
+          </a:ln>
+          <a:effectLst/>
+        </p:spPr>
+        <p:style>
+          <a:lnRef idx="1">
+            <a:schemeClr val="accent1"/>
+          </a:lnRef>
+          <a:fillRef idx="3">
+            <a:schemeClr val="accent1"/>
+          </a:fillRef>
+          <a:effectRef idx="2">
+            <a:schemeClr val="accent1"/>
+          </a:effectRef>
+          <a:fontRef idx="minor">
+            <a:schemeClr val="lt1"/>
+          </a:fontRef>
+        </p:style>
+        <p:txBody>
+          <a:bodyPr rtlCol="0" anchor="ctr" wrap="square"/>
+          <a:lstStyle/>
+          <a:p>
+            <a:pPr algn="l">
+              <a:lnSpc>
+                <a:spcPct val="130000"/>
+              </a:lnSpc>
+            </a:pPr>
+            <a:r>
+              <a:rPr sz="1350" b="0">
+                <a:solidFill>
+                  <a:srgbClr val="3A3F57"/>
+                </a:solidFill>
+                <a:latin typeface="맑은 고딕"/>
+                <a:ea typeface="맑은 고딕"/>
+              </a:rPr>
+              <a:t>   가설은 </a:t>
+            </a:r>
+            <a:r>
+              <a:rPr sz="1350" b="1">
+                <a:solidFill>
+                  <a:srgbClr val="171A2E"/>
+                </a:solidFill>
+                <a:latin typeface="맑은 고딕"/>
+                <a:ea typeface="맑은 고딕"/>
+              </a:rPr>
+              <a:t>입사 후 초기 진단</a:t>
+            </a:r>
+            <a:r>
+              <a:rPr sz="1350" b="0">
+                <a:solidFill>
+                  <a:srgbClr val="3A3F57"/>
+                </a:solidFill>
+                <a:latin typeface="맑은 고딕"/>
+                <a:ea typeface="맑은 고딕"/>
+              </a:rPr>
+              <a:t>으로 갱신됩니다. 데이터 활용은 </a:t>
+            </a:r>
+            <a:r>
+              <a:rPr sz="1350" b="1">
+                <a:solidFill>
+                  <a:srgbClr val="171A2E"/>
+                </a:solidFill>
+                <a:latin typeface="맑은 고딕"/>
+                <a:ea typeface="맑은 고딕"/>
+              </a:rPr>
+              <a:t>환자 동의·규제 범위 확인이 전제</a:t>
+            </a:r>
+            <a:r>
+              <a:rPr sz="1350" b="0">
+                <a:solidFill>
+                  <a:srgbClr val="3A3F57"/>
+                </a:solidFill>
+                <a:latin typeface="맑은 고딕"/>
+                <a:ea typeface="맑은 고딕"/>
+              </a:rPr>
+              <a:t>이며, 임상·규제 판단은 전문가와 함께합니다. 제품·조직·데이터 통합은 내부 상황을 파악한 뒤 확정하겠습니다.</a:t>
+            </a:r>
+          </a:p>
+        </p:txBody>
+      </p:sp>
+      <p:sp>
+        <p:nvSpPr>
+          <p:cNvPr id="33" name="Rectangle 32"/>
+          <p:cNvSpPr/>
+          <p:nvPr/>
+        </p:nvSpPr>
+        <p:spPr>
+          <a:xfrm>
+            <a:off x="685800" y="5257800"/>
+            <a:ext cx="64008" cy="713232"/>
+          </a:xfrm>
+          <a:prstGeom prst="rect">
+            <a:avLst/>
+          </a:prstGeom>
+          <a:solidFill>
+            <a:srgbClr val="A9AEC2"/>
+          </a:solidFill>
+          <a:ln>
+            <a:noFill/>
+          </a:ln>
+          <a:effectLst/>
+        </p:spPr>
+        <p:style>
+          <a:lnRef idx="1">
+            <a:schemeClr val="accent1"/>
+          </a:lnRef>
+          <a:fillRef idx="3">
+            <a:schemeClr val="accent1"/>
+          </a:fillRef>
+          <a:effectRef idx="2">
+            <a:schemeClr val="accent1"/>
+          </a:effectRef>
+          <a:fontRef idx="minor">
+            <a:schemeClr val="lt1"/>
+          </a:fontRef>
+        </p:style>
+        <p:txBody>
+          <a:bodyPr rtlCol="0" anchor="ctr"/>
+          <a:lstStyle/>
+          <a:p>
+            <a:pPr algn="ctr"/>
+          </a:p>
+        </p:txBody>
+      </p:sp>
+      <p:sp>
+        <p:nvSpPr>
+          <p:cNvPr id="34" name="TextBox 33"/>
           <p:cNvSpPr txBox="1"/>
           <p:nvPr/>
         </p:nvSpPr>
         <p:spPr>
           <a:xfrm>
-            <a:off x="10058400" y="6382512"/>
-            <a:ext cx="1463040" cy="320040"/>
+            <a:off x="685800" y="6382512"/>
+            <a:ext cx="8778240" cy="384048"/>
           </a:xfrm>
           <a:prstGeom prst="rect">
             <a:avLst/>
@@ -17174,6 +18953,52 @@
           </a:bodyPr>
           <a:lstStyle/>
           <a:p>
+            <a:pPr algn="l">
+              <a:lnSpc>
+                <a:spcPct val="125000"/>
+              </a:lnSpc>
+              <a:spcBef>
+                <a:spcPts val="0"/>
+              </a:spcBef>
+              <a:spcAft>
+                <a:spcPts val="0"/>
+              </a:spcAft>
+            </a:pPr>
+            <a:r>
+              <a:rPr sz="1050" b="0">
+                <a:solidFill>
+                  <a:srgbClr val="7C8299"/>
+                </a:solidFill>
+                <a:latin typeface="맑은 고딕"/>
+                <a:ea typeface="맑은 고딕"/>
+              </a:rPr>
+              <a:t>공개 자산 기반의 검증 가설(확정 아님) · 특정 환자 데이터 사용 권한을 이미 확보했다고 가정하지 않음</a:t>
+            </a:r>
+          </a:p>
+        </p:txBody>
+      </p:sp>
+      <p:sp>
+        <p:nvSpPr>
+          <p:cNvPr id="35" name="TextBox 34"/>
+          <p:cNvSpPr txBox="1"/>
+          <p:nvPr/>
+        </p:nvSpPr>
+        <p:spPr>
+          <a:xfrm>
+            <a:off x="10058400" y="6382512"/>
+            <a:ext cx="1463040" cy="320040"/>
+          </a:xfrm>
+          <a:prstGeom prst="rect">
+            <a:avLst/>
+          </a:prstGeom>
+          <a:noFill/>
+        </p:spPr>
+        <p:txBody>
+          <a:bodyPr wrap="square" anchor="t" lIns="0" rIns="0" tIns="0" bIns="0">
+            <a:spAutoFit/>
+          </a:bodyPr>
+          <a:lstStyle/>
+          <a:p>
             <a:pPr algn="r">
               <a:lnSpc>
                 <a:spcPct val="100000"/>
@@ -17188,12 +19013,12 @@
             <a:r>
               <a:rPr sz="1100" b="1" spc="140">
                 <a:solidFill>
-                  <a:srgbClr val="7F89AB"/>
-                </a:solidFill>
-                <a:latin typeface="맑은 고딕"/>
-                <a:ea typeface="맑은 고딕"/>
-              </a:rPr>
-              <a:t>09 / 09</a:t>
+                  <a:srgbClr val="7C8299"/>
+                </a:solidFill>
+                <a:latin typeface="맑은 고딕"/>
+                <a:ea typeface="맑은 고딕"/>
+              </a:rPr>
+              <a:t>09 / 10</a:t>
             </a:r>
           </a:p>
         </p:txBody>

--- a/정치성_DAI_AI헬스케어플랫폼팀장_면접PT.pptx
+++ b/정치성_DAI_AI헬스케어플랫폼팀장_면접PT.pptx
@@ -17644,7 +17644,7 @@
                 <a:latin typeface="맑은 고딕"/>
                 <a:ea typeface="맑은 고딕"/>
               </a:rPr>
-              <a:t>가설 A · 환자 경험 연결</a:t>
+              <a:t>가설 A · 환자 경험 연결(접착제)</a:t>
             </a:r>
           </a:p>
           <a:p>
@@ -17667,7 +17667,7 @@
                 <a:latin typeface="맑은 고딕"/>
                 <a:ea typeface="맑은 고딕"/>
               </a:rPr>
-              <a:t>흩어진 모니터링·관리 접점을  하나의 환자 흐름으로 잇는다</a:t>
+              <a:t>진단·모니터링·관리를  하나의 환자 여정으로 잇는다</a:t>
             </a:r>
           </a:p>
         </p:txBody>
@@ -17759,7 +17759,7 @@
                 <a:latin typeface="맑은 고딕"/>
                 <a:ea typeface="맑은 고딕"/>
               </a:rPr>
-              <a:t>측정·관리 데이터가 </a:t>
+              <a:t>접점이 지금은 따로 쓰인다 — </a:t>
             </a:r>
             <a:r>
               <a:rPr sz="1400" b="1">
@@ -17769,7 +17769,7 @@
                 <a:latin typeface="맑은 고딕"/>
                 <a:ea typeface="맑은 고딕"/>
               </a:rPr>
-              <a:t>한 흐름으로 이어지면</a:t>
+              <a:t>측정→해석→다음 행동</a:t>
             </a:r>
             <a:r>
               <a:rPr sz="1400" b="0">
@@ -17779,7 +17779,7 @@
                 <a:latin typeface="맑은 고딕"/>
                 <a:ea typeface="맑은 고딕"/>
               </a:rPr>
-              <a:t> 측정 지속·다음 행동 연결이 좋아진다</a:t>
+              <a:t>이 한 여정으로 이어지면 측정 지속·후속 연결이 좋아진다</a:t>
             </a:r>
           </a:p>
         </p:txBody>
@@ -17871,7 +17871,7 @@
                 <a:latin typeface="맑은 고딕"/>
                 <a:ea typeface="맑은 고딕"/>
               </a:rPr>
-              <a:t>그룹은 모니터링·관리 접점(하이카디·케어센스에어 등)을 이미 확보 — </a:t>
+              <a:t>그룹은 진단·모니터링·관리 접점(닥터눈·하이카디·케어센스에어)을 이미 확보 — 잇는 </a:t>
             </a:r>
             <a:r>
               <a:rPr sz="1400" b="1">
@@ -17881,7 +17881,7 @@
                 <a:latin typeface="맑은 고딕"/>
                 <a:ea typeface="맑은 고딕"/>
               </a:rPr>
-              <a:t>‘잇는 경험’은 빈자리</a:t>
+              <a:t>‘경험 레이어’가 빈자리</a:t>
             </a:r>
           </a:p>
         </p:txBody>
@@ -17973,7 +17973,7 @@
                 <a:latin typeface="맑은 고딕"/>
                 <a:ea typeface="맑은 고딕"/>
               </a:rPr>
-              <a:t>소수 사용자 대상 </a:t>
+              <a:t>만성질환군 소수 대상, 두 접점 잇는 </a:t>
             </a:r>
             <a:r>
               <a:rPr sz="1400" b="1">
@@ -17983,7 +17983,7 @@
                 <a:latin typeface="맑은 고딕"/>
                 <a:ea typeface="맑은 고딕"/>
               </a:rPr>
-              <a:t>얇은 연결 슬라이스</a:t>
+              <a:t>얇은 슬라이스</a:t>
             </a:r>
             <a:r>
               <a:rPr sz="1400" b="0">
@@ -17993,7 +17993,7 @@
                 <a:latin typeface="맑은 고딕"/>
                 <a:ea typeface="맑은 고딕"/>
               </a:rPr>
-              <a:t> 프로토타입으로 실사용·이탈 관측</a:t>
+              <a:t>로 측정 지속·행동 연결 관측</a:t>
             </a:r>
           </a:p>
         </p:txBody>
@@ -18129,7 +18129,7 @@
                 <a:latin typeface="맑은 고딕"/>
                 <a:ea typeface="맑은 고딕"/>
               </a:rPr>
-              <a:t>실사용(채택) + 안전 인시던트 0 + 동의·규제 확인 통과</a:t>
+              <a:t>측정 지속·행동 연결↑ + 안전 인시던트 0 + 동의·규제 통과</a:t>
             </a:r>
             <a:r>
               <a:rPr sz="1350" b="0">
@@ -18277,7 +18277,7 @@
                 <a:latin typeface="맑은 고딕"/>
                 <a:ea typeface="맑은 고딕"/>
               </a:rPr>
-              <a:t>가설 B · 접근성 (원무 경험 이식)</a:t>
+              <a:t>가설 B · 데이터 플라이휠(RWD)</a:t>
             </a:r>
           </a:p>
           <a:p>
@@ -18300,7 +18300,7 @@
                 <a:latin typeface="맑은 고딕"/>
                 <a:ea typeface="맑은 고딕"/>
               </a:rPr>
-              <a:t>예약~동의~결과 확인의  마찰을 줄여 등록·재사용을 높인다</a:t>
+              <a:t>여정에서 쌓인 데이터를  표준화해 개선에 재사용한다</a:t>
             </a:r>
           </a:p>
         </p:txBody>
@@ -18392,7 +18392,7 @@
                 <a:latin typeface="맑은 고딕"/>
                 <a:ea typeface="맑은 고딕"/>
               </a:rPr>
-              <a:t>등록·동의·조회의 </a:t>
+              <a:t>접점의 이용·측정 데이터를 </a:t>
             </a:r>
             <a:r>
               <a:rPr sz="1400" b="1">
@@ -18402,7 +18402,7 @@
                 <a:latin typeface="맑은 고딕"/>
                 <a:ea typeface="맑은 고딕"/>
               </a:rPr>
-              <a:t>마찰을 줄이면</a:t>
+              <a:t>표준 형식으로 축적</a:t>
             </a:r>
             <a:r>
               <a:rPr sz="1400" b="0">
@@ -18412,7 +18412,7 @@
                 <a:latin typeface="맑은 고딕"/>
                 <a:ea typeface="맑은 고딕"/>
               </a:rPr>
-              <a:t> 디지털 헬스 접점의 등록·재사용률이 오른다</a:t>
+              <a:t>하면, 개선·근거의 토대로 재사용되어 개선이 빨라진다</a:t>
             </a:r>
           </a:p>
         </p:txBody>
@@ -18504,7 +18504,7 @@
                 <a:latin typeface="맑은 고딕"/>
                 <a:ea typeface="맑은 고딕"/>
               </a:rPr>
-              <a:t>EMR 연동 원무를 </a:t>
+              <a:t>접점이 따로 돌면 데이터도 흩어진다 — </a:t>
             </a:r>
             <a:r>
               <a:rPr sz="1400" b="1">
@@ -18514,7 +18514,7 @@
                 <a:latin typeface="맑은 고딕"/>
                 <a:ea typeface="맑은 고딕"/>
               </a:rPr>
-              <a:t>서비스화한 제 경험</a:t>
+              <a:t>상호운용 표준 ‘데이터 레이어’</a:t>
             </a:r>
             <a:r>
               <a:rPr sz="1400" b="0">
@@ -18524,7 +18524,7 @@
                 <a:latin typeface="맑은 고딕"/>
                 <a:ea typeface="맑은 고딕"/>
               </a:rPr>
-              <a:t>이 그대로 붙는 지점</a:t>
+              <a:t>가 재사용의 전제</a:t>
             </a:r>
           </a:p>
         </p:txBody>
@@ -18616,7 +18616,7 @@
                 <a:latin typeface="맑은 고딕"/>
                 <a:ea typeface="맑은 고딕"/>
               </a:rPr>
-              <a:t>한 개 접점에서 </a:t>
+              <a:t>한 여정에서 </a:t>
             </a:r>
             <a:r>
               <a:rPr sz="1400" b="1">
@@ -18626,7 +18626,7 @@
                 <a:latin typeface="맑은 고딕"/>
                 <a:ea typeface="맑은 고딕"/>
               </a:rPr>
-              <a:t>등록·동의·조회 플로우 개선안</a:t>
+              <a:t>최소 공통 데이터 표준</a:t>
             </a:r>
             <a:r>
               <a:rPr sz="1400" b="0">
@@ -18636,7 +18636,7 @@
                 <a:latin typeface="맑은 고딕"/>
                 <a:ea typeface="맑은 고딕"/>
               </a:rPr>
-              <a:t>을 실증</a:t>
+              <a:t>(동의·항목·포맷) 정의 → 수집·재사용 파이프라인 소규모 실증</a:t>
             </a:r>
           </a:p>
         </p:txBody>
@@ -18772,7 +18772,7 @@
                 <a:latin typeface="맑은 고딕"/>
                 <a:ea typeface="맑은 고딕"/>
               </a:rPr>
-              <a:t>등록 완료율·재사용 관측</a:t>
+              <a:t>데이터 완결성·재사용 가능성 확인 + 동의·보안·규제 통과</a:t>
             </a:r>
             <a:r>
               <a:rPr sz="1350" b="0">
@@ -18782,7 +18782,7 @@
                 <a:latin typeface="맑은 고딕"/>
                 <a:ea typeface="맑은 고딕"/>
               </a:rPr>
-              <a:t> → 공통화 가치가 확인되면 확대</a:t>
+              <a:t> → 확대 / 미달 → 표준 범위 재조정</a:t>
             </a:r>
           </a:p>
         </p:txBody>
@@ -18842,7 +18842,7 @@
                 <a:latin typeface="맑은 고딕"/>
                 <a:ea typeface="맑은 고딕"/>
               </a:rPr>
-              <a:t>   가설은 </a:t>
+              <a:t>   두 가설은 ‘접점을 잇고 → 데이터 재사용’으로 이어집니다. 확정이 아니라 </a:t>
             </a:r>
             <a:r>
               <a:rPr sz="1350" b="1">
@@ -18862,7 +18862,7 @@
                 <a:latin typeface="맑은 고딕"/>
                 <a:ea typeface="맑은 고딕"/>
               </a:rPr>
-              <a:t>으로 갱신됩니다. 데이터 활용은 </a:t>
+              <a:t>으로 갱신하며, 데이터 활용은 </a:t>
             </a:r>
             <a:r>
               <a:rPr sz="1350" b="1">
@@ -18872,7 +18872,7 @@
                 <a:latin typeface="맑은 고딕"/>
                 <a:ea typeface="맑은 고딕"/>
               </a:rPr>
-              <a:t>환자 동의·규제 범위 확인이 전제</a:t>
+              <a:t>환자 동의·보안·규제 범위 확인이 전제</a:t>
             </a:r>
             <a:r>
               <a:rPr sz="1350" b="0">
@@ -18882,7 +18882,7 @@
                 <a:latin typeface="맑은 고딕"/>
                 <a:ea typeface="맑은 고딕"/>
               </a:rPr>
-              <a:t>이며, 임상·규제 판단은 전문가와 함께합니다. 제품·조직·데이터 통합은 내부 상황을 파악한 뒤 확정하겠습니다.</a:t>
+              <a:t>입니다. 특정 환자 데이터 사용 권한을 이미 확보했다고 가정하지 않고, 임상·규제는 전문가와 함께합니다.</a:t>
             </a:r>
           </a:p>
         </p:txBody>

--- a/정치성_DAI_AI헬스케어플랫폼팀장_면접PT.pptx
+++ b/정치성_DAI_AI헬스케어플랫폼팀장_면접PT.pptx
@@ -6012,7 +6012,7 @@
                 <a:latin typeface="맑은 고딕"/>
                 <a:ea typeface="맑은 고딕"/>
               </a:rPr>
-              <a:t>사용자가 무엇을 완료해야 하는지와, 운영자가 어떻게 처리해야 하는지를 함께 설계해 왔습니다.</a:t>
+              <a:t/>
             </a:r>
           </a:p>
         </p:txBody>
@@ -8117,7 +8117,7 @@
                 <a:latin typeface="맑은 고딕"/>
                 <a:ea typeface="맑은 고딕"/>
               </a:rPr>
-              <a:t>사용자 편의와 사업 전환, 운영 품질을 함께 확인한 경험 · 전후 전환율 절대값은 제공되지 않아 표기하지 않음</a:t>
+              <a:t>전후 전환율 절대값은 미제공되어 표기하지 않음</a:t>
             </a:r>
           </a:p>
         </p:txBody>
@@ -9600,7 +9600,7 @@
                 <a:latin typeface="맑은 고딕"/>
                 <a:ea typeface="맑은 고딕"/>
               </a:rPr>
-              <a:t>사용자 기능과 운영자의 처리 기준을 함께 설계 · 처리시간 개선은 고물량 제조사 적용 구간 한정(전사 생산성 아님)</a:t>
+              <a:t>고물량 제조사 적용 구간 한정 · 전사 생산성 아님</a:t>
             </a:r>
           </a:p>
         </p:txBody>
@@ -11596,7 +11596,7 @@
                 <a:latin typeface="맑은 고딕"/>
                 <a:ea typeface="맑은 고딕"/>
               </a:rPr>
-              <a:t>기관별 조건을 확인하며 공통화 범위와 추가 개발을 판단 · 통합 플랫폼은 제안·검토 단계(구현 완료 아님)</a:t>
+              <a:t>통합 플랫폼은 제안·검토 단계(구현 완료 아님)</a:t>
             </a:r>
           </a:p>
         </p:txBody>
@@ -13345,7 +13345,7 @@
                 <a:latin typeface="맑은 고딕"/>
                 <a:ea typeface="맑은 고딕"/>
               </a:rPr>
-              <a:t>관리자 직함이나 조직 규모가 아니라, 우선순위를 정하고 팀별 책임으로 실행을 이끈 방식</a:t>
+              <a:t/>
             </a:r>
           </a:p>
         </p:txBody>
@@ -13812,7 +13812,7 @@
                 <a:latin typeface="맑은 고딕"/>
                 <a:ea typeface="맑은 고딕"/>
               </a:rPr>
-              <a:t>AI로 앞단을 구체화</a:t>
+              <a:t>AI로 초안을 빠르게 만든다</a:t>
             </a:r>
           </a:p>
         </p:txBody>
@@ -14803,7 +14803,7 @@
                 <a:latin typeface="맑은 고딕"/>
                 <a:ea typeface="맑은 고딕"/>
               </a:rPr>
-              <a:t>정보 요약 기능이라면 — </a:t>
+              <a:t>정보 요약 기능이라면 </a:t>
             </a:r>
             <a:r>
               <a:rPr sz="1600" b="1">
@@ -14866,7 +14866,7 @@
                 <a:latin typeface="맑은 고딕"/>
                 <a:ea typeface="맑은 고딕"/>
               </a:rPr>
-              <a:t>향후 접근법입니다. 실제 의료 AI 프로젝트 성과가 아닙니다. 임상·규제 판단은 관련 전문가와 협업합니다.</a:t>
+              <a:t>향후 접근법입니다. 실제 의료 AI 성과가 아니며, 임상·규제는 전문가와 함께합니다.</a:t>
             </a:r>
           </a:p>
         </p:txBody>
@@ -14912,7 +14912,7 @@
                 <a:latin typeface="맑은 고딕"/>
                 <a:ea typeface="맑은 고딕"/>
               </a:rPr>
-              <a:t>AI 도구의 실행 경험과, 정식 서비스의 검증·운영 기준을 구분해서 다룹니다</a:t>
+              <a:t/>
             </a:r>
           </a:p>
         </p:txBody>
@@ -17148,7 +17148,7 @@
                 <a:latin typeface="맑은 고딕"/>
                 <a:ea typeface="맑은 고딕"/>
               </a:rPr>
-              <a:t>확정 일정이나 청사진이 아니라, 판단하고 확장하는 접근법 · 특정 기간·매출·출시 약속은 두지 않음</a:t>
+              <a:t>특정 기간·매출·출시 약속은 두지 않음</a:t>
             </a:r>
           </a:p>
         </p:txBody>
@@ -17644,7 +17644,7 @@
                 <a:latin typeface="맑은 고딕"/>
                 <a:ea typeface="맑은 고딕"/>
               </a:rPr>
-              <a:t>가설 A · 환자 경험 연결(접착제)</a:t>
+              <a:t>가설 A · 환자 경험 연결</a:t>
             </a:r>
           </a:p>
           <a:p>
@@ -17759,7 +17759,7 @@
                 <a:latin typeface="맑은 고딕"/>
                 <a:ea typeface="맑은 고딕"/>
               </a:rPr>
-              <a:t>접점이 지금은 따로 쓰인다 — </a:t>
+              <a:t>접점이 지금은 따로 쓰인다. </a:t>
             </a:r>
             <a:r>
               <a:rPr sz="1400" b="1">
@@ -17769,7 +17769,7 @@
                 <a:latin typeface="맑은 고딕"/>
                 <a:ea typeface="맑은 고딕"/>
               </a:rPr>
-              <a:t>측정→해석→다음 행동</a:t>
+              <a:t>측정·해석·다음 행동</a:t>
             </a:r>
             <a:r>
               <a:rPr sz="1400" b="0">
@@ -17871,7 +17871,7 @@
                 <a:latin typeface="맑은 고딕"/>
                 <a:ea typeface="맑은 고딕"/>
               </a:rPr>
-              <a:t>그룹은 진단·모니터링·관리 접점(닥터눈·하이카디·케어센스에어)을 이미 확보 — 잇는 </a:t>
+              <a:t>그룹은 진단·모니터링·관리 접점(닥터눈·하이카디·케어센스에어)을 이미 갖고 있다. </a:t>
             </a:r>
             <a:r>
               <a:rPr sz="1400" b="1">
@@ -17881,7 +17881,7 @@
                 <a:latin typeface="맑은 고딕"/>
                 <a:ea typeface="맑은 고딕"/>
               </a:rPr>
-              <a:t>‘경험 레이어’가 빈자리</a:t>
+              <a:t>이를 잇는 경험은 아직 없다</a:t>
             </a:r>
           </a:p>
         </p:txBody>
@@ -17973,7 +17973,7 @@
                 <a:latin typeface="맑은 고딕"/>
                 <a:ea typeface="맑은 고딕"/>
               </a:rPr>
-              <a:t>만성질환군 소수 대상, 두 접점 잇는 </a:t>
+              <a:t>만성질환자 일부 대상, </a:t>
             </a:r>
             <a:r>
               <a:rPr sz="1400" b="1">
@@ -17983,7 +17983,7 @@
                 <a:latin typeface="맑은 고딕"/>
                 <a:ea typeface="맑은 고딕"/>
               </a:rPr>
-              <a:t>얇은 슬라이스</a:t>
+              <a:t>두 접점을 먼저 연결</a:t>
             </a:r>
             <a:r>
               <a:rPr sz="1400" b="0">
@@ -17993,7 +17993,7 @@
                 <a:latin typeface="맑은 고딕"/>
                 <a:ea typeface="맑은 고딕"/>
               </a:rPr>
-              <a:t>로 측정 지속·행동 연결 관측</a:t>
+              <a:t>해 측정 지속·행동 연결 관측</a:t>
             </a:r>
           </a:p>
         </p:txBody>
@@ -18392,7 +18392,7 @@
                 <a:latin typeface="맑은 고딕"/>
                 <a:ea typeface="맑은 고딕"/>
               </a:rPr>
-              <a:t>접점의 이용·측정 데이터를 </a:t>
+              <a:t>접점에서 쌓이는 데이터를 </a:t>
             </a:r>
             <a:r>
               <a:rPr sz="1400" b="1">
@@ -18402,7 +18402,7 @@
                 <a:latin typeface="맑은 고딕"/>
                 <a:ea typeface="맑은 고딕"/>
               </a:rPr>
-              <a:t>표준 형식으로 축적</a:t>
+              <a:t>표준 형식으로 모으면</a:t>
             </a:r>
             <a:r>
               <a:rPr sz="1400" b="0">
@@ -18412,7 +18412,7 @@
                 <a:latin typeface="맑은 고딕"/>
                 <a:ea typeface="맑은 고딕"/>
               </a:rPr>
-              <a:t>하면, 개선·근거의 토대로 재사용되어 개선이 빨라진다</a:t>
+              <a:t>, 다음 개선과 근거 마련에 다시 쓸 수 있다</a:t>
             </a:r>
           </a:p>
         </p:txBody>
@@ -18504,7 +18504,7 @@
                 <a:latin typeface="맑은 고딕"/>
                 <a:ea typeface="맑은 고딕"/>
               </a:rPr>
-              <a:t>접점이 따로 돌면 데이터도 흩어진다 — </a:t>
+              <a:t>접점이 따로 돌면 데이터도 흩어진다. </a:t>
             </a:r>
             <a:r>
               <a:rPr sz="1400" b="1">
@@ -18514,7 +18514,7 @@
                 <a:latin typeface="맑은 고딕"/>
                 <a:ea typeface="맑은 고딕"/>
               </a:rPr>
-              <a:t>상호운용 표준 ‘데이터 레이어’</a:t>
+              <a:t>표준을 맞춰 모아야</a:t>
             </a:r>
             <a:r>
               <a:rPr sz="1400" b="0">
@@ -18524,7 +18524,7 @@
                 <a:latin typeface="맑은 고딕"/>
                 <a:ea typeface="맑은 고딕"/>
               </a:rPr>
-              <a:t>가 재사용의 전제</a:t>
+              <a:t> 다시 쓸 수 있다</a:t>
             </a:r>
           </a:p>
         </p:txBody>
@@ -18636,7 +18636,7 @@
                 <a:latin typeface="맑은 고딕"/>
                 <a:ea typeface="맑은 고딕"/>
               </a:rPr>
-              <a:t>(동의·항목·포맷) 정의 → 수집·재사용 파이프라인 소규모 실증</a:t>
+              <a:t>(동의·항목·포맷)을 정하고, 모아서 다시 쓰는 과정을 작은 범위로 시험</a:t>
             </a:r>
           </a:p>
         </p:txBody>
@@ -18842,7 +18842,7 @@
                 <a:latin typeface="맑은 고딕"/>
                 <a:ea typeface="맑은 고딕"/>
               </a:rPr>
-              <a:t>   두 가설은 ‘접점을 잇고 → 데이터 재사용’으로 이어집니다. 확정이 아니라 </a:t>
+              <a:t>   확정된 계획이 아니라 </a:t>
             </a:r>
             <a:r>
               <a:rPr sz="1350" b="1">
@@ -18852,7 +18852,7 @@
                 <a:latin typeface="맑은 고딕"/>
                 <a:ea typeface="맑은 고딕"/>
               </a:rPr>
-              <a:t>입사 후 초기 진단</a:t>
+              <a:t>입사 후 살펴보며 정할 가설</a:t>
             </a:r>
             <a:r>
               <a:rPr sz="1350" b="0">
@@ -18862,7 +18862,7 @@
                 <a:latin typeface="맑은 고딕"/>
                 <a:ea typeface="맑은 고딕"/>
               </a:rPr>
-              <a:t>으로 갱신하며, 데이터 활용은 </a:t>
+              <a:t>입니다. 데이터는 </a:t>
             </a:r>
             <a:r>
               <a:rPr sz="1350" b="1">
@@ -18872,7 +18872,7 @@
                 <a:latin typeface="맑은 고딕"/>
                 <a:ea typeface="맑은 고딕"/>
               </a:rPr>
-              <a:t>환자 동의·보안·규제 범위 확인이 전제</a:t>
+              <a:t>환자 동의와 보안·규제 범위 안에서만</a:t>
             </a:r>
             <a:r>
               <a:rPr sz="1350" b="0">
@@ -18882,7 +18882,7 @@
                 <a:latin typeface="맑은 고딕"/>
                 <a:ea typeface="맑은 고딕"/>
               </a:rPr>
-              <a:t>입니다. 특정 환자 데이터 사용 권한을 이미 확보했다고 가정하지 않고, 임상·규제는 전문가와 함께합니다.</a:t>
+              <a:t> 씁니다.</a:t>
             </a:r>
           </a:p>
         </p:txBody>
@@ -18972,7 +18972,7 @@
                 <a:latin typeface="맑은 고딕"/>
                 <a:ea typeface="맑은 고딕"/>
               </a:rPr>
-              <a:t>공개 자산 기반의 검증 가설(확정 아님) · 특정 환자 데이터 사용 권한을 이미 확보했다고 가정하지 않음</a:t>
+              <a:t>공개 자산 기반 검증 가설(확정 아님) · 특정 환자 데이터 권한 확보 가정 안 함</a:t>
             </a:r>
           </a:p>
         </p:txBody>

--- a/정치성_DAI_AI헬스케어플랫폼팀장_면접PT.pptx
+++ b/정치성_DAI_AI헬스케어플랫폼팀장_면접PT.pptx
@@ -11905,47 +11905,27 @@
       </p:sp>
       <p:sp>
         <p:nvSpPr>
-          <p:cNvPr id="7" name="Rounded Rectangle 6"/>
-          <p:cNvSpPr/>
-          <p:nvPr/>
-        </p:nvSpPr>
-        <p:spPr>
-          <a:xfrm>
-            <a:off x="685800" y="2331720"/>
-            <a:ext cx="2103120" cy="822960"/>
-          </a:xfrm>
-          <a:prstGeom prst="roundRect">
-            <a:avLst>
-              <a:gd name="adj" fmla="val 10000"/>
-            </a:avLst>
-          </a:prstGeom>
-          <a:solidFill>
-            <a:srgbClr val="141A33"/>
-          </a:solidFill>
-          <a:ln>
-            <a:noFill/>
-          </a:ln>
-          <a:effectLst/>
-        </p:spPr>
-        <p:style>
-          <a:lnRef idx="1">
-            <a:schemeClr val="accent1"/>
-          </a:lnRef>
-          <a:fillRef idx="3">
-            <a:schemeClr val="accent1"/>
-          </a:fillRef>
-          <a:effectRef idx="2">
-            <a:schemeClr val="accent1"/>
-          </a:effectRef>
-          <a:fontRef idx="minor">
-            <a:schemeClr val="lt1"/>
-          </a:fontRef>
-        </p:style>
-        <p:txBody>
-          <a:bodyPr rtlCol="0" anchor="ctr"/>
-          <a:lstStyle/>
-          <a:p>
-            <a:pPr algn="ctr">
+          <p:cNvPr id="7" name="TextBox 6"/>
+          <p:cNvSpPr txBox="1"/>
+          <p:nvPr/>
+        </p:nvSpPr>
+        <p:spPr>
+          <a:xfrm>
+            <a:off x="685800" y="2468880"/>
+            <a:ext cx="4114800" cy="365760"/>
+          </a:xfrm>
+          <a:prstGeom prst="rect">
+            <a:avLst/>
+          </a:prstGeom>
+          <a:noFill/>
+        </p:spPr>
+        <p:txBody>
+          <a:bodyPr wrap="square" anchor="t" lIns="0" rIns="0" tIns="0" bIns="0">
+            <a:spAutoFit/>
+          </a:bodyPr>
+          <a:lstStyle/>
+          <a:p>
+            <a:pPr algn="l">
               <a:lnSpc>
                 <a:spcPct val="100000"/>
               </a:lnSpc>
@@ -11957,37 +11937,24 @@
               </a:spcAft>
             </a:pPr>
             <a:r>
-              <a:rPr sz="1200" b="1">
-                <a:solidFill>
-                  <a:srgbClr val="5FD0EE"/>
-                </a:solidFill>
-                <a:latin typeface="맑은 고딕"/>
-                <a:ea typeface="맑은 고딕"/>
-              </a:rPr>
-              <a:t>본인 · 팀장</a:t>
-            </a:r>
-          </a:p>
-          <a:p>
-            <a:pPr algn="ctr">
-              <a:lnSpc>
-                <a:spcPct val="100000"/>
-              </a:lnSpc>
-              <a:spcBef>
-                <a:spcPts val="200"/>
-              </a:spcBef>
-              <a:spcAft>
-                <a:spcPts val="0"/>
-              </a:spcAft>
-            </a:pPr>
+              <a:rPr sz="1800" b="0">
+                <a:solidFill>
+                  <a:srgbClr val="3A3F57"/>
+                </a:solidFill>
+                <a:latin typeface="맑은 고딕"/>
+                <a:ea typeface="맑은 고딕"/>
+              </a:rPr>
+              <a:t>본인이 맡은 </a:t>
+            </a:r>
             <a:r>
               <a:rPr sz="1800" b="1">
                 <a:solidFill>
-                  <a:srgbClr val="FFFFFF"/>
-                </a:solidFill>
-                <a:latin typeface="맑은 고딕"/>
-                <a:ea typeface="맑은 고딕"/>
-              </a:rPr>
-              <a:t>3개 팀 운영</a:t>
+                  <a:srgbClr val="171A2E"/>
+                </a:solidFill>
+                <a:latin typeface="맑은 고딕"/>
+                <a:ea typeface="맑은 고딕"/>
+              </a:rPr>
+              <a:t>3개 팀</a:t>
             </a:r>
           </a:p>
         </p:txBody>
@@ -12000,8 +11967,8 @@
         </p:nvSpPr>
         <p:spPr>
           <a:xfrm>
-            <a:off x="1234440" y="3383280"/>
-            <a:ext cx="3383280" cy="566928"/>
+            <a:off x="685800" y="2971800"/>
+            <a:ext cx="3931920" cy="603504"/>
           </a:xfrm>
           <a:prstGeom prst="roundRect">
             <a:avLst>
@@ -12048,8 +12015,8 @@
         </p:nvSpPr>
         <p:spPr>
           <a:xfrm>
-            <a:off x="1463040" y="3502152"/>
-            <a:ext cx="1828800" cy="365760"/>
+            <a:off x="914400" y="3118104"/>
+            <a:ext cx="2194560" cy="365760"/>
           </a:xfrm>
           <a:prstGeom prst="rect">
             <a:avLst/>
@@ -12074,7 +12041,7 @@
               </a:spcAft>
             </a:pPr>
             <a:r>
-              <a:rPr sz="1600" b="1">
+              <a:rPr sz="1700" b="1">
                 <a:solidFill>
                   <a:srgbClr val="171A2E"/>
                 </a:solidFill>
@@ -12094,8 +12061,8 @@
         </p:nvSpPr>
         <p:spPr>
           <a:xfrm>
-            <a:off x="3108960" y="3529584"/>
-            <a:ext cx="1371600" cy="320040"/>
+            <a:off x="2651760" y="3145536"/>
+            <a:ext cx="1920240" cy="320040"/>
           </a:xfrm>
           <a:prstGeom prst="rect">
             <a:avLst/>
@@ -12120,7 +12087,7 @@
               </a:spcAft>
             </a:pPr>
             <a:r>
-              <a:rPr sz="1200" b="1">
+              <a:rPr sz="1250" b="1">
                 <a:solidFill>
                   <a:srgbClr val="0C6D8C"/>
                 </a:solidFill>
@@ -12140,8 +12107,8 @@
         </p:nvSpPr>
         <p:spPr>
           <a:xfrm>
-            <a:off x="1234440" y="4069080"/>
-            <a:ext cx="3383280" cy="566928"/>
+            <a:off x="685800" y="3657600"/>
+            <a:ext cx="3931920" cy="603504"/>
           </a:xfrm>
           <a:prstGeom prst="roundRect">
             <a:avLst>
@@ -12188,8 +12155,8 @@
         </p:nvSpPr>
         <p:spPr>
           <a:xfrm>
-            <a:off x="1463040" y="4187952"/>
-            <a:ext cx="1828800" cy="365760"/>
+            <a:off x="914400" y="3803904"/>
+            <a:ext cx="2194560" cy="365760"/>
           </a:xfrm>
           <a:prstGeom prst="rect">
             <a:avLst/>
@@ -12214,7 +12181,7 @@
               </a:spcAft>
             </a:pPr>
             <a:r>
-              <a:rPr sz="1600" b="1">
+              <a:rPr sz="1700" b="1">
                 <a:solidFill>
                   <a:srgbClr val="171A2E"/>
                 </a:solidFill>
@@ -12234,8 +12201,8 @@
         </p:nvSpPr>
         <p:spPr>
           <a:xfrm>
-            <a:off x="3108960" y="4215384"/>
-            <a:ext cx="1371600" cy="320040"/>
+            <a:off x="2651760" y="3831336"/>
+            <a:ext cx="1920240" cy="320040"/>
           </a:xfrm>
           <a:prstGeom prst="rect">
             <a:avLst/>
@@ -12260,7 +12227,7 @@
               </a:spcAft>
             </a:pPr>
             <a:r>
-              <a:rPr sz="1200" b="1">
+              <a:rPr sz="1250" b="1">
                 <a:solidFill>
                   <a:srgbClr val="7C8299"/>
                 </a:solidFill>
@@ -12280,8 +12247,8 @@
         </p:nvSpPr>
         <p:spPr>
           <a:xfrm>
-            <a:off x="1234440" y="4754880"/>
-            <a:ext cx="3383280" cy="566928"/>
+            <a:off x="685800" y="4343400"/>
+            <a:ext cx="3931920" cy="603504"/>
           </a:xfrm>
           <a:prstGeom prst="roundRect">
             <a:avLst>
@@ -12328,8 +12295,8 @@
         </p:nvSpPr>
         <p:spPr>
           <a:xfrm>
-            <a:off x="1463040" y="4873752"/>
-            <a:ext cx="1828800" cy="365760"/>
+            <a:off x="914400" y="4489704"/>
+            <a:ext cx="2194560" cy="365760"/>
           </a:xfrm>
           <a:prstGeom prst="rect">
             <a:avLst/>
@@ -12354,7 +12321,7 @@
               </a:spcAft>
             </a:pPr>
             <a:r>
-              <a:rPr sz="1600" b="1">
+              <a:rPr sz="1700" b="1">
                 <a:solidFill>
                   <a:srgbClr val="171A2E"/>
                 </a:solidFill>
@@ -12374,8 +12341,8 @@
         </p:nvSpPr>
         <p:spPr>
           <a:xfrm>
-            <a:off x="3108960" y="4901184"/>
-            <a:ext cx="1371600" cy="320040"/>
+            <a:off x="2651760" y="4517136"/>
+            <a:ext cx="1920240" cy="320040"/>
           </a:xfrm>
           <a:prstGeom prst="rect">
             <a:avLst/>
@@ -12400,7 +12367,7 @@
               </a:spcAft>
             </a:pPr>
             <a:r>
-              <a:rPr sz="1200" b="1">
+              <a:rPr sz="1250" b="1">
                 <a:solidFill>
                   <a:srgbClr val="7C8299"/>
                 </a:solidFill>
@@ -17519,8 +17486,8 @@
         </p:nvSpPr>
         <p:spPr>
           <a:xfrm>
-            <a:off x="685800" y="2057400"/>
-            <a:ext cx="5330952" cy="3063240"/>
+            <a:off x="685800" y="2011680"/>
+            <a:ext cx="5330952" cy="3200400"/>
           </a:xfrm>
           <a:prstGeom prst="roundRect">
             <a:avLst>
@@ -17567,8 +17534,8 @@
         </p:nvSpPr>
         <p:spPr>
           <a:xfrm>
-            <a:off x="685800" y="2057400"/>
-            <a:ext cx="5330952" cy="841248"/>
+            <a:off x="685800" y="2011680"/>
+            <a:ext cx="5330952" cy="896112"/>
           </a:xfrm>
           <a:prstGeom prst="rect">
             <a:avLst/>
@@ -17611,8 +17578,8 @@
         </p:nvSpPr>
         <p:spPr>
           <a:xfrm>
-            <a:off x="941832" y="2185416"/>
-            <a:ext cx="4873752" cy="640080"/>
+            <a:off x="941832" y="2148840"/>
+            <a:ext cx="4873752" cy="685800"/>
           </a:xfrm>
           <a:prstGeom prst="rect">
             <a:avLst/>
@@ -17637,7 +17604,7 @@
               </a:spcAft>
             </a:pPr>
             <a:r>
-              <a:rPr sz="1250" b="1" spc="40">
+              <a:rPr sz="1300" b="1" spc="30">
                 <a:solidFill>
                   <a:srgbClr val="5FD0EE"/>
                 </a:solidFill>
@@ -17650,7 +17617,7 @@
           <a:p>
             <a:pPr algn="l">
               <a:lnSpc>
-                <a:spcPct val="120000"/>
+                <a:spcPct val="100000"/>
               </a:lnSpc>
               <a:spcBef>
                 <a:spcPts val="400"/>
@@ -17660,14 +17627,14 @@
               </a:spcAft>
             </a:pPr>
             <a:r>
-              <a:rPr sz="1650" b="1">
+              <a:rPr sz="2100" b="1">
                 <a:solidFill>
                   <a:srgbClr val="FFFFFF"/>
                 </a:solidFill>
                 <a:latin typeface="맑은 고딕"/>
                 <a:ea typeface="맑은 고딕"/>
               </a:rPr>
-              <a:t>진단·모니터링·관리를  하나의 환자 여정으로 잇는다</a:t>
+              <a:t>흩어진 접점을 하나로 잇는다</a:t>
             </a:r>
           </a:p>
         </p:txBody>
@@ -17680,8 +17647,8 @@
         </p:nvSpPr>
         <p:spPr>
           <a:xfrm>
-            <a:off x="941832" y="3026664"/>
-            <a:ext cx="868680" cy="457200"/>
+            <a:off x="941832" y="3017520"/>
+            <a:ext cx="640080" cy="365760"/>
           </a:xfrm>
           <a:prstGeom prst="rect">
             <a:avLst/>
@@ -17708,7 +17675,7 @@
             <a:r>
               <a:rPr sz="1250" b="1">
                 <a:solidFill>
-                  <a:srgbClr val="0C6D8C"/>
+                  <a:srgbClr val="7C8299"/>
                 </a:solidFill>
                 <a:latin typeface="맑은 고딕"/>
                 <a:ea typeface="맑은 고딕"/>
@@ -17726,8 +17693,8 @@
         </p:nvSpPr>
         <p:spPr>
           <a:xfrm>
-            <a:off x="1874520" y="3026664"/>
-            <a:ext cx="3867912" cy="548640"/>
+            <a:off x="1645920" y="3017520"/>
+            <a:ext cx="4096512" cy="457200"/>
           </a:xfrm>
           <a:prstGeom prst="rect">
             <a:avLst/>
@@ -17742,44 +17709,44 @@
           <a:p>
             <a:pPr algn="l">
               <a:lnSpc>
-                <a:spcPct val="125000"/>
-              </a:lnSpc>
-              <a:spcBef>
-                <a:spcPts val="0"/>
-              </a:spcBef>
-              <a:spcAft>
-                <a:spcPts val="0"/>
-              </a:spcAft>
-            </a:pPr>
-            <a:r>
-              <a:rPr sz="1400" b="0">
+                <a:spcPct val="112000"/>
+              </a:lnSpc>
+              <a:spcBef>
+                <a:spcPts val="0"/>
+              </a:spcBef>
+              <a:spcAft>
+                <a:spcPts val="0"/>
+              </a:spcAft>
+            </a:pPr>
+            <a:r>
+              <a:rPr sz="1450" b="0">
                 <a:solidFill>
                   <a:srgbClr val="3A3F57"/>
                 </a:solidFill>
                 <a:latin typeface="맑은 고딕"/>
                 <a:ea typeface="맑은 고딕"/>
               </a:rPr>
-              <a:t>접점이 지금은 따로 쓰인다. </a:t>
-            </a:r>
-            <a:r>
-              <a:rPr sz="1400" b="1">
+              <a:t>접점이 한 여정으로 이어지면 </a:t>
+            </a:r>
+            <a:r>
+              <a:rPr sz="1450" b="1">
                 <a:solidFill>
                   <a:srgbClr val="171A2E"/>
                 </a:solidFill>
                 <a:latin typeface="맑은 고딕"/>
                 <a:ea typeface="맑은 고딕"/>
               </a:rPr>
-              <a:t>측정·해석·다음 행동</a:t>
-            </a:r>
-            <a:r>
-              <a:rPr sz="1400" b="0">
+              <a:t>측정 지속·다음 행동 연결</a:t>
+            </a:r>
+            <a:r>
+              <a:rPr sz="1450" b="0">
                 <a:solidFill>
                   <a:srgbClr val="3A3F57"/>
                 </a:solidFill>
                 <a:latin typeface="맑은 고딕"/>
                 <a:ea typeface="맑은 고딕"/>
               </a:rPr>
-              <a:t>이 한 여정으로 이어지면 측정 지속·후속 연결이 좋아진다</a:t>
+              <a:t>이 는다</a:t>
             </a:r>
           </a:p>
         </p:txBody>
@@ -17792,8 +17759,8 @@
         </p:nvSpPr>
         <p:spPr>
           <a:xfrm>
-            <a:off x="941832" y="3538728"/>
-            <a:ext cx="868680" cy="457200"/>
+            <a:off x="941832" y="3447288"/>
+            <a:ext cx="640080" cy="365760"/>
           </a:xfrm>
           <a:prstGeom prst="rect">
             <a:avLst/>
@@ -17820,7 +17787,7 @@
             <a:r>
               <a:rPr sz="1250" b="1">
                 <a:solidFill>
-                  <a:srgbClr val="0C6D8C"/>
+                  <a:srgbClr val="7C8299"/>
                 </a:solidFill>
                 <a:latin typeface="맑은 고딕"/>
                 <a:ea typeface="맑은 고딕"/>
@@ -17838,8 +17805,8 @@
         </p:nvSpPr>
         <p:spPr>
           <a:xfrm>
-            <a:off x="1874520" y="3538728"/>
-            <a:ext cx="3867912" cy="548640"/>
+            <a:off x="1645920" y="3447288"/>
+            <a:ext cx="4096512" cy="457200"/>
           </a:xfrm>
           <a:prstGeom prst="rect">
             <a:avLst/>
@@ -17854,34 +17821,24 @@
           <a:p>
             <a:pPr algn="l">
               <a:lnSpc>
-                <a:spcPct val="125000"/>
-              </a:lnSpc>
-              <a:spcBef>
-                <a:spcPts val="0"/>
-              </a:spcBef>
-              <a:spcAft>
-                <a:spcPts val="0"/>
-              </a:spcAft>
-            </a:pPr>
-            <a:r>
-              <a:rPr sz="1400" b="0">
+                <a:spcPct val="112000"/>
+              </a:lnSpc>
+              <a:spcBef>
+                <a:spcPts val="0"/>
+              </a:spcBef>
+              <a:spcAft>
+                <a:spcPts val="0"/>
+              </a:spcAft>
+            </a:pPr>
+            <a:r>
+              <a:rPr sz="1450" b="0">
                 <a:solidFill>
                   <a:srgbClr val="3A3F57"/>
                 </a:solidFill>
                 <a:latin typeface="맑은 고딕"/>
                 <a:ea typeface="맑은 고딕"/>
               </a:rPr>
-              <a:t>그룹은 진단·모니터링·관리 접점(닥터눈·하이카디·케어센스에어)을 이미 갖고 있다. </a:t>
-            </a:r>
-            <a:r>
-              <a:rPr sz="1400" b="1">
-                <a:solidFill>
-                  <a:srgbClr val="171A2E"/>
-                </a:solidFill>
-                <a:latin typeface="맑은 고딕"/>
-                <a:ea typeface="맑은 고딕"/>
-              </a:rPr>
-              <a:t>이를 잇는 경험은 아직 없다</a:t>
+              <a:t>그룹은 진단·모니터링·관리 접점을 이미 보유(닥터눈·하이카디·케어센스에어)</a:t>
             </a:r>
           </a:p>
         </p:txBody>
@@ -17894,8 +17851,8 @@
         </p:nvSpPr>
         <p:spPr>
           <a:xfrm>
-            <a:off x="941832" y="4050792"/>
-            <a:ext cx="868680" cy="457200"/>
+            <a:off x="941832" y="3877056"/>
+            <a:ext cx="640080" cy="365760"/>
           </a:xfrm>
           <a:prstGeom prst="rect">
             <a:avLst/>
@@ -17922,7 +17879,7 @@
             <a:r>
               <a:rPr sz="1250" b="1">
                 <a:solidFill>
-                  <a:srgbClr val="0C6D8C"/>
+                  <a:srgbClr val="7C8299"/>
                 </a:solidFill>
                 <a:latin typeface="맑은 고딕"/>
                 <a:ea typeface="맑은 고딕"/>
@@ -17940,8 +17897,8 @@
         </p:nvSpPr>
         <p:spPr>
           <a:xfrm>
-            <a:off x="1874520" y="4050792"/>
-            <a:ext cx="3867912" cy="548640"/>
+            <a:off x="1645920" y="3877056"/>
+            <a:ext cx="4096512" cy="457200"/>
           </a:xfrm>
           <a:prstGeom prst="rect">
             <a:avLst/>
@@ -17956,27 +17913,27 @@
           <a:p>
             <a:pPr algn="l">
               <a:lnSpc>
-                <a:spcPct val="125000"/>
-              </a:lnSpc>
-              <a:spcBef>
-                <a:spcPts val="0"/>
-              </a:spcBef>
-              <a:spcAft>
-                <a:spcPts val="0"/>
-              </a:spcAft>
-            </a:pPr>
-            <a:r>
-              <a:rPr sz="1400" b="0">
+                <a:spcPct val="112000"/>
+              </a:lnSpc>
+              <a:spcBef>
+                <a:spcPts val="0"/>
+              </a:spcBef>
+              <a:spcAft>
+                <a:spcPts val="0"/>
+              </a:spcAft>
+            </a:pPr>
+            <a:r>
+              <a:rPr sz="1450" b="0">
                 <a:solidFill>
                   <a:srgbClr val="3A3F57"/>
                 </a:solidFill>
                 <a:latin typeface="맑은 고딕"/>
                 <a:ea typeface="맑은 고딕"/>
               </a:rPr>
-              <a:t>만성질환자 일부 대상, </a:t>
-            </a:r>
-            <a:r>
-              <a:rPr sz="1400" b="1">
+              <a:t>만성질환자 일부에게 </a:t>
+            </a:r>
+            <a:r>
+              <a:rPr sz="1450" b="1">
                 <a:solidFill>
                   <a:srgbClr val="171A2E"/>
                 </a:solidFill>
@@ -17985,35 +17942,117 @@
               </a:rPr>
               <a:t>두 접점을 먼저 연결</a:t>
             </a:r>
-            <a:r>
-              <a:rPr sz="1400" b="0">
-                <a:solidFill>
-                  <a:srgbClr val="3A3F57"/>
-                </a:solidFill>
-                <a:latin typeface="맑은 고딕"/>
-                <a:ea typeface="맑은 고딕"/>
-              </a:rPr>
-              <a:t>해 측정 지속·행동 연결 관측</a:t>
-            </a:r>
-          </a:p>
-        </p:txBody>
-      </p:sp>
-      <p:sp>
-        <p:nvSpPr>
-          <p:cNvPr id="17" name="Rectangle 16"/>
+          </a:p>
+        </p:txBody>
+      </p:sp>
+      <p:sp>
+        <p:nvSpPr>
+          <p:cNvPr id="17" name="TextBox 16"/>
+          <p:cNvSpPr txBox="1"/>
+          <p:nvPr/>
+        </p:nvSpPr>
+        <p:spPr>
+          <a:xfrm>
+            <a:off x="941832" y="4306824"/>
+            <a:ext cx="640080" cy="365760"/>
+          </a:xfrm>
+          <a:prstGeom prst="rect">
+            <a:avLst/>
+          </a:prstGeom>
+          <a:noFill/>
+        </p:spPr>
+        <p:txBody>
+          <a:bodyPr wrap="square" anchor="t" lIns="0" rIns="0" tIns="0" bIns="0">
+            <a:spAutoFit/>
+          </a:bodyPr>
+          <a:lstStyle/>
+          <a:p>
+            <a:pPr algn="l">
+              <a:lnSpc>
+                <a:spcPct val="100000"/>
+              </a:lnSpc>
+              <a:spcBef>
+                <a:spcPts val="0"/>
+              </a:spcBef>
+              <a:spcAft>
+                <a:spcPts val="0"/>
+              </a:spcAft>
+            </a:pPr>
+            <a:r>
+              <a:rPr sz="1250" b="1">
+                <a:solidFill>
+                  <a:srgbClr val="0C6D8C"/>
+                </a:solidFill>
+                <a:latin typeface="맑은 고딕"/>
+                <a:ea typeface="맑은 고딕"/>
+              </a:rPr>
+              <a:t>KPI</a:t>
+            </a:r>
+          </a:p>
+        </p:txBody>
+      </p:sp>
+      <p:sp>
+        <p:nvSpPr>
+          <p:cNvPr id="18" name="TextBox 17"/>
+          <p:cNvSpPr txBox="1"/>
+          <p:nvPr/>
+        </p:nvSpPr>
+        <p:spPr>
+          <a:xfrm>
+            <a:off x="1645920" y="4306824"/>
+            <a:ext cx="4096512" cy="457200"/>
+          </a:xfrm>
+          <a:prstGeom prst="rect">
+            <a:avLst/>
+          </a:prstGeom>
+          <a:noFill/>
+        </p:spPr>
+        <p:txBody>
+          <a:bodyPr wrap="square" anchor="t" lIns="0" rIns="0" tIns="0" bIns="0">
+            <a:spAutoFit/>
+          </a:bodyPr>
+          <a:lstStyle/>
+          <a:p>
+            <a:pPr algn="l">
+              <a:lnSpc>
+                <a:spcPct val="112000"/>
+              </a:lnSpc>
+              <a:spcBef>
+                <a:spcPts val="0"/>
+              </a:spcBef>
+              <a:spcAft>
+                <a:spcPts val="0"/>
+              </a:spcAft>
+            </a:pPr>
+            <a:r>
+              <a:rPr sz="1450" b="1">
+                <a:solidFill>
+                  <a:srgbClr val="0C6D8C"/>
+                </a:solidFill>
+                <a:latin typeface="맑은 고딕"/>
+                <a:ea typeface="맑은 고딕"/>
+              </a:rPr>
+              <a:t>측정 지속률 · 다음 행동 연결률 · 안전 인시던트 0</a:t>
+            </a:r>
+          </a:p>
+        </p:txBody>
+      </p:sp>
+      <p:sp>
+        <p:nvSpPr>
+          <p:cNvPr id="19" name="Rectangle 18"/>
           <p:cNvSpPr/>
           <p:nvPr/>
         </p:nvSpPr>
         <p:spPr>
           <a:xfrm>
-            <a:off x="740664" y="4544568"/>
-            <a:ext cx="5221224" cy="521207"/>
+            <a:off x="740664" y="4718304"/>
+            <a:ext cx="5221224" cy="457200"/>
           </a:xfrm>
           <a:prstGeom prst="rect">
             <a:avLst/>
           </a:prstGeom>
           <a:solidFill>
-            <a:srgbClr val="E7F4F9"/>
+            <a:srgbClr val="141A33"/>
           </a:solidFill>
           <a:ln>
             <a:noFill/>
@@ -18044,14 +18083,14 @@
       </p:sp>
       <p:sp>
         <p:nvSpPr>
-          <p:cNvPr id="18" name="TextBox 17"/>
+          <p:cNvPr id="20" name="TextBox 19"/>
           <p:cNvSpPr txBox="1"/>
           <p:nvPr/>
         </p:nvSpPr>
         <p:spPr>
           <a:xfrm>
-            <a:off x="941832" y="4617720"/>
-            <a:ext cx="868680" cy="411480"/>
+            <a:off x="941832" y="4782312"/>
+            <a:ext cx="640080" cy="365760"/>
           </a:xfrm>
           <a:prstGeom prst="rect">
             <a:avLst/>
@@ -18078,26 +18117,26 @@
             <a:r>
               <a:rPr sz="1250" b="1">
                 <a:solidFill>
-                  <a:srgbClr val="0C6D8C"/>
-                </a:solidFill>
-                <a:latin typeface="맑은 고딕"/>
-                <a:ea typeface="맑은 고딕"/>
-              </a:rPr>
-              <a:t>성공·중단</a:t>
-            </a:r>
-          </a:p>
-        </p:txBody>
-      </p:sp>
-      <p:sp>
-        <p:nvSpPr>
-          <p:cNvPr id="19" name="TextBox 18"/>
+                  <a:srgbClr val="5FD0EE"/>
+                </a:solidFill>
+                <a:latin typeface="맑은 고딕"/>
+                <a:ea typeface="맑은 고딕"/>
+              </a:rPr>
+              <a:t>판단</a:t>
+            </a:r>
+          </a:p>
+        </p:txBody>
+      </p:sp>
+      <p:sp>
+        <p:nvSpPr>
+          <p:cNvPr id="21" name="TextBox 20"/>
           <p:cNvSpPr txBox="1"/>
           <p:nvPr/>
         </p:nvSpPr>
         <p:spPr>
           <a:xfrm>
-            <a:off x="1874520" y="4608576"/>
-            <a:ext cx="3913632" cy="457200"/>
+            <a:off x="1645920" y="4773168"/>
+            <a:ext cx="4142232" cy="384048"/>
           </a:xfrm>
           <a:prstGeom prst="rect">
             <a:avLst/>
@@ -18112,48 +18151,58 @@
           <a:p>
             <a:pPr algn="l">
               <a:lnSpc>
-                <a:spcPct val="120000"/>
-              </a:lnSpc>
-              <a:spcBef>
-                <a:spcPts val="0"/>
-              </a:spcBef>
-              <a:spcAft>
-                <a:spcPts val="0"/>
-              </a:spcAft>
-            </a:pPr>
+                <a:spcPct val="110000"/>
+              </a:lnSpc>
+              <a:spcBef>
+                <a:spcPts val="0"/>
+              </a:spcBef>
+              <a:spcAft>
+                <a:spcPts val="0"/>
+              </a:spcAft>
+            </a:pPr>
+            <a:r>
+              <a:rPr sz="1350" b="0">
+                <a:solidFill>
+                  <a:srgbClr val="FFFFFF"/>
+                </a:solidFill>
+                <a:latin typeface="맑은 고딕"/>
+                <a:ea typeface="맑은 고딕"/>
+              </a:rPr>
+              <a:t>지표 개선 + 동의·규제 통과 → </a:t>
+            </a:r>
             <a:r>
               <a:rPr sz="1350" b="1">
                 <a:solidFill>
-                  <a:srgbClr val="0C6D8C"/>
-                </a:solidFill>
-                <a:latin typeface="맑은 고딕"/>
-                <a:ea typeface="맑은 고딕"/>
-              </a:rPr>
-              <a:t>측정 지속·행동 연결↑ + 안전 인시던트 0 + 동의·규제 통과</a:t>
+                  <a:srgbClr val="5FD0EE"/>
+                </a:solidFill>
+                <a:latin typeface="맑은 고딕"/>
+                <a:ea typeface="맑은 고딕"/>
+              </a:rPr>
+              <a:t>확대</a:t>
             </a:r>
             <a:r>
               <a:rPr sz="1350" b="0">
                 <a:solidFill>
-                  <a:srgbClr val="171A2E"/>
-                </a:solidFill>
-                <a:latin typeface="맑은 고딕"/>
-                <a:ea typeface="맑은 고딕"/>
-              </a:rPr>
-              <a:t> → 확장 / 미달 → 축소·보류</a:t>
-            </a:r>
-          </a:p>
-        </p:txBody>
-      </p:sp>
-      <p:sp>
-        <p:nvSpPr>
-          <p:cNvPr id="20" name="Rounded Rectangle 19"/>
+                  <a:srgbClr val="FFFFFF"/>
+                </a:solidFill>
+                <a:latin typeface="맑은 고딕"/>
+                <a:ea typeface="맑은 고딕"/>
+              </a:rPr>
+              <a:t> / 미달 → 보류</a:t>
+            </a:r>
+          </a:p>
+        </p:txBody>
+      </p:sp>
+      <p:sp>
+        <p:nvSpPr>
+          <p:cNvPr id="22" name="Rounded Rectangle 21"/>
           <p:cNvSpPr/>
           <p:nvPr/>
         </p:nvSpPr>
         <p:spPr>
           <a:xfrm>
-            <a:off x="6144768" y="2057400"/>
-            <a:ext cx="5330952" cy="3063240"/>
+            <a:off x="6144768" y="2011680"/>
+            <a:ext cx="5330952" cy="3200400"/>
           </a:xfrm>
           <a:prstGeom prst="roundRect">
             <a:avLst>
@@ -18194,14 +18243,14 @@
       </p:sp>
       <p:sp>
         <p:nvSpPr>
-          <p:cNvPr id="21" name="Rectangle 20"/>
+          <p:cNvPr id="23" name="Rectangle 22"/>
           <p:cNvSpPr/>
           <p:nvPr/>
         </p:nvSpPr>
         <p:spPr>
           <a:xfrm>
-            <a:off x="6144768" y="2057400"/>
-            <a:ext cx="5330952" cy="841248"/>
+            <a:off x="6144768" y="2011680"/>
+            <a:ext cx="5330952" cy="896112"/>
           </a:xfrm>
           <a:prstGeom prst="rect">
             <a:avLst/>
@@ -18238,14 +18287,14 @@
       </p:sp>
       <p:sp>
         <p:nvSpPr>
-          <p:cNvPr id="22" name="TextBox 21"/>
+          <p:cNvPr id="24" name="TextBox 23"/>
           <p:cNvSpPr txBox="1"/>
           <p:nvPr/>
         </p:nvSpPr>
         <p:spPr>
           <a:xfrm>
-            <a:off x="6400800" y="2185416"/>
-            <a:ext cx="4873752" cy="640080"/>
+            <a:off x="6400800" y="2148840"/>
+            <a:ext cx="4873752" cy="685800"/>
           </a:xfrm>
           <a:prstGeom prst="rect">
             <a:avLst/>
@@ -18270,7 +18319,7 @@
               </a:spcAft>
             </a:pPr>
             <a:r>
-              <a:rPr sz="1250" b="1" spc="40">
+              <a:rPr sz="1300" b="1" spc="30">
                 <a:solidFill>
                   <a:srgbClr val="5FD0EE"/>
                 </a:solidFill>
@@ -18283,7 +18332,7 @@
           <a:p>
             <a:pPr algn="l">
               <a:lnSpc>
-                <a:spcPct val="120000"/>
+                <a:spcPct val="100000"/>
               </a:lnSpc>
               <a:spcBef>
                 <a:spcPts val="400"/>
@@ -18293,28 +18342,28 @@
               </a:spcAft>
             </a:pPr>
             <a:r>
-              <a:rPr sz="1650" b="1">
+              <a:rPr sz="2100" b="1">
                 <a:solidFill>
                   <a:srgbClr val="FFFFFF"/>
                 </a:solidFill>
                 <a:latin typeface="맑은 고딕"/>
                 <a:ea typeface="맑은 고딕"/>
               </a:rPr>
-              <a:t>여정에서 쌓인 데이터를  표준화해 개선에 재사용한다</a:t>
-            </a:r>
-          </a:p>
-        </p:txBody>
-      </p:sp>
-      <p:sp>
-        <p:nvSpPr>
-          <p:cNvPr id="23" name="TextBox 22"/>
+              <a:t>데이터를 모아 다시 쓴다</a:t>
+            </a:r>
+          </a:p>
+        </p:txBody>
+      </p:sp>
+      <p:sp>
+        <p:nvSpPr>
+          <p:cNvPr id="25" name="TextBox 24"/>
           <p:cNvSpPr txBox="1"/>
           <p:nvPr/>
         </p:nvSpPr>
         <p:spPr>
           <a:xfrm>
-            <a:off x="6400800" y="3026664"/>
-            <a:ext cx="868680" cy="457200"/>
+            <a:off x="6400800" y="3017520"/>
+            <a:ext cx="640080" cy="365760"/>
           </a:xfrm>
           <a:prstGeom prst="rect">
             <a:avLst/>
@@ -18341,7 +18390,7 @@
             <a:r>
               <a:rPr sz="1250" b="1">
                 <a:solidFill>
-                  <a:srgbClr val="0C6D8C"/>
+                  <a:srgbClr val="7C8299"/>
                 </a:solidFill>
                 <a:latin typeface="맑은 고딕"/>
                 <a:ea typeface="맑은 고딕"/>
@@ -18353,14 +18402,14 @@
       </p:sp>
       <p:sp>
         <p:nvSpPr>
-          <p:cNvPr id="24" name="TextBox 23"/>
+          <p:cNvPr id="26" name="TextBox 25"/>
           <p:cNvSpPr txBox="1"/>
           <p:nvPr/>
         </p:nvSpPr>
         <p:spPr>
           <a:xfrm>
-            <a:off x="7333488" y="3026664"/>
-            <a:ext cx="3867912" cy="548640"/>
+            <a:off x="7104888" y="3017520"/>
+            <a:ext cx="4096512" cy="457200"/>
           </a:xfrm>
           <a:prstGeom prst="rect">
             <a:avLst/>
@@ -18375,58 +18424,48 @@
           <a:p>
             <a:pPr algn="l">
               <a:lnSpc>
-                <a:spcPct val="125000"/>
-              </a:lnSpc>
-              <a:spcBef>
-                <a:spcPts val="0"/>
-              </a:spcBef>
-              <a:spcAft>
-                <a:spcPts val="0"/>
-              </a:spcAft>
-            </a:pPr>
-            <a:r>
-              <a:rPr sz="1400" b="0">
+                <a:spcPct val="112000"/>
+              </a:lnSpc>
+              <a:spcBef>
+                <a:spcPts val="0"/>
+              </a:spcBef>
+              <a:spcAft>
+                <a:spcPts val="0"/>
+              </a:spcAft>
+            </a:pPr>
+            <a:r>
+              <a:rPr sz="1450" b="0">
                 <a:solidFill>
                   <a:srgbClr val="3A3F57"/>
                 </a:solidFill>
                 <a:latin typeface="맑은 고딕"/>
                 <a:ea typeface="맑은 고딕"/>
               </a:rPr>
-              <a:t>접점에서 쌓이는 데이터를 </a:t>
-            </a:r>
-            <a:r>
-              <a:rPr sz="1400" b="1">
+              <a:t>접점 데이터를 표준으로 모으면 </a:t>
+            </a:r>
+            <a:r>
+              <a:rPr sz="1450" b="1">
                 <a:solidFill>
                   <a:srgbClr val="171A2E"/>
                 </a:solidFill>
                 <a:latin typeface="맑은 고딕"/>
                 <a:ea typeface="맑은 고딕"/>
               </a:rPr>
-              <a:t>표준 형식으로 모으면</a:t>
-            </a:r>
-            <a:r>
-              <a:rPr sz="1400" b="0">
-                <a:solidFill>
-                  <a:srgbClr val="3A3F57"/>
-                </a:solidFill>
-                <a:latin typeface="맑은 고딕"/>
-                <a:ea typeface="맑은 고딕"/>
-              </a:rPr>
-              <a:t>, 다음 개선과 근거 마련에 다시 쓸 수 있다</a:t>
-            </a:r>
-          </a:p>
-        </p:txBody>
-      </p:sp>
-      <p:sp>
-        <p:nvSpPr>
-          <p:cNvPr id="25" name="TextBox 24"/>
+              <a:t>개선·근거에 다시 쓸 수 있다</a:t>
+            </a:r>
+          </a:p>
+        </p:txBody>
+      </p:sp>
+      <p:sp>
+        <p:nvSpPr>
+          <p:cNvPr id="27" name="TextBox 26"/>
           <p:cNvSpPr txBox="1"/>
           <p:nvPr/>
         </p:nvSpPr>
         <p:spPr>
           <a:xfrm>
-            <a:off x="6400800" y="3538728"/>
-            <a:ext cx="868680" cy="457200"/>
+            <a:off x="6400800" y="3447288"/>
+            <a:ext cx="640080" cy="365760"/>
           </a:xfrm>
           <a:prstGeom prst="rect">
             <a:avLst/>
@@ -18453,7 +18492,7 @@
             <a:r>
               <a:rPr sz="1250" b="1">
                 <a:solidFill>
-                  <a:srgbClr val="0C6D8C"/>
+                  <a:srgbClr val="7C8299"/>
                 </a:solidFill>
                 <a:latin typeface="맑은 고딕"/>
                 <a:ea typeface="맑은 고딕"/>
@@ -18465,14 +18504,14 @@
       </p:sp>
       <p:sp>
         <p:nvSpPr>
-          <p:cNvPr id="26" name="TextBox 25"/>
+          <p:cNvPr id="28" name="TextBox 27"/>
           <p:cNvSpPr txBox="1"/>
           <p:nvPr/>
         </p:nvSpPr>
         <p:spPr>
           <a:xfrm>
-            <a:off x="7333488" y="3538728"/>
-            <a:ext cx="3867912" cy="548640"/>
+            <a:off x="7104888" y="3447288"/>
+            <a:ext cx="4096512" cy="457200"/>
           </a:xfrm>
           <a:prstGeom prst="rect">
             <a:avLst/>
@@ -18487,58 +18526,38 @@
           <a:p>
             <a:pPr algn="l">
               <a:lnSpc>
-                <a:spcPct val="125000"/>
-              </a:lnSpc>
-              <a:spcBef>
-                <a:spcPts val="0"/>
-              </a:spcBef>
-              <a:spcAft>
-                <a:spcPts val="0"/>
-              </a:spcAft>
-            </a:pPr>
-            <a:r>
-              <a:rPr sz="1400" b="0">
+                <a:spcPct val="112000"/>
+              </a:lnSpc>
+              <a:spcBef>
+                <a:spcPts val="0"/>
+              </a:spcBef>
+              <a:spcAft>
+                <a:spcPts val="0"/>
+              </a:spcAft>
+            </a:pPr>
+            <a:r>
+              <a:rPr sz="1450" b="0">
                 <a:solidFill>
                   <a:srgbClr val="3A3F57"/>
                 </a:solidFill>
                 <a:latin typeface="맑은 고딕"/>
                 <a:ea typeface="맑은 고딕"/>
               </a:rPr>
-              <a:t>접점이 따로 돌면 데이터도 흩어진다. </a:t>
-            </a:r>
-            <a:r>
-              <a:rPr sz="1400" b="1">
-                <a:solidFill>
-                  <a:srgbClr val="171A2E"/>
-                </a:solidFill>
-                <a:latin typeface="맑은 고딕"/>
-                <a:ea typeface="맑은 고딕"/>
-              </a:rPr>
-              <a:t>표준을 맞춰 모아야</a:t>
-            </a:r>
-            <a:r>
-              <a:rPr sz="1400" b="0">
-                <a:solidFill>
-                  <a:srgbClr val="3A3F57"/>
-                </a:solidFill>
-                <a:latin typeface="맑은 고딕"/>
-                <a:ea typeface="맑은 고딕"/>
-              </a:rPr>
-              <a:t> 다시 쓸 수 있다</a:t>
-            </a:r>
-          </a:p>
-        </p:txBody>
-      </p:sp>
-      <p:sp>
-        <p:nvSpPr>
-          <p:cNvPr id="27" name="TextBox 26"/>
+              <a:t>접점이 따로 돌면 데이터도 흩어진다</a:t>
+            </a:r>
+          </a:p>
+        </p:txBody>
+      </p:sp>
+      <p:sp>
+        <p:nvSpPr>
+          <p:cNvPr id="29" name="TextBox 28"/>
           <p:cNvSpPr txBox="1"/>
           <p:nvPr/>
         </p:nvSpPr>
         <p:spPr>
           <a:xfrm>
-            <a:off x="6400800" y="4050792"/>
-            <a:ext cx="868680" cy="457200"/>
+            <a:off x="6400800" y="3877056"/>
+            <a:ext cx="640080" cy="365760"/>
           </a:xfrm>
           <a:prstGeom prst="rect">
             <a:avLst/>
@@ -18565,7 +18584,7 @@
             <a:r>
               <a:rPr sz="1250" b="1">
                 <a:solidFill>
-                  <a:srgbClr val="0C6D8C"/>
+                  <a:srgbClr val="7C8299"/>
                 </a:solidFill>
                 <a:latin typeface="맑은 고딕"/>
                 <a:ea typeface="맑은 고딕"/>
@@ -18577,14 +18596,14 @@
       </p:sp>
       <p:sp>
         <p:nvSpPr>
-          <p:cNvPr id="28" name="TextBox 27"/>
+          <p:cNvPr id="30" name="TextBox 29"/>
           <p:cNvSpPr txBox="1"/>
           <p:nvPr/>
         </p:nvSpPr>
         <p:spPr>
           <a:xfrm>
-            <a:off x="7333488" y="4050792"/>
-            <a:ext cx="3867912" cy="548640"/>
+            <a:off x="7104888" y="3877056"/>
+            <a:ext cx="4096512" cy="457200"/>
           </a:xfrm>
           <a:prstGeom prst="rect">
             <a:avLst/>
@@ -18599,17 +18618,17 @@
           <a:p>
             <a:pPr algn="l">
               <a:lnSpc>
-                <a:spcPct val="125000"/>
-              </a:lnSpc>
-              <a:spcBef>
-                <a:spcPts val="0"/>
-              </a:spcBef>
-              <a:spcAft>
-                <a:spcPts val="0"/>
-              </a:spcAft>
-            </a:pPr>
-            <a:r>
-              <a:rPr sz="1400" b="0">
+                <a:spcPct val="112000"/>
+              </a:lnSpc>
+              <a:spcBef>
+                <a:spcPts val="0"/>
+              </a:spcBef>
+              <a:spcAft>
+                <a:spcPts val="0"/>
+              </a:spcAft>
+            </a:pPr>
+            <a:r>
+              <a:rPr sz="1450" b="0">
                 <a:solidFill>
                   <a:srgbClr val="3A3F57"/>
                 </a:solidFill>
@@ -18619,44 +18638,136 @@
               <a:t>한 여정에서 </a:t>
             </a:r>
             <a:r>
-              <a:rPr sz="1400" b="1">
+              <a:rPr sz="1450" b="1">
                 <a:solidFill>
                   <a:srgbClr val="171A2E"/>
                 </a:solidFill>
                 <a:latin typeface="맑은 고딕"/>
                 <a:ea typeface="맑은 고딕"/>
               </a:rPr>
-              <a:t>최소 공통 데이터 표준</a:t>
-            </a:r>
-            <a:r>
-              <a:rPr sz="1400" b="0">
+              <a:t>공통 데이터 기준</a:t>
+            </a:r>
+            <a:r>
+              <a:rPr sz="1450" b="0">
                 <a:solidFill>
                   <a:srgbClr val="3A3F57"/>
                 </a:solidFill>
                 <a:latin typeface="맑은 고딕"/>
                 <a:ea typeface="맑은 고딕"/>
               </a:rPr>
-              <a:t>(동의·항목·포맷)을 정하고, 모아서 다시 쓰는 과정을 작은 범위로 시험</a:t>
-            </a:r>
-          </a:p>
-        </p:txBody>
-      </p:sp>
-      <p:sp>
-        <p:nvSpPr>
-          <p:cNvPr id="29" name="Rectangle 28"/>
+              <a:t>을 정해 소규모 시험</a:t>
+            </a:r>
+          </a:p>
+        </p:txBody>
+      </p:sp>
+      <p:sp>
+        <p:nvSpPr>
+          <p:cNvPr id="31" name="TextBox 30"/>
+          <p:cNvSpPr txBox="1"/>
+          <p:nvPr/>
+        </p:nvSpPr>
+        <p:spPr>
+          <a:xfrm>
+            <a:off x="6400800" y="4306824"/>
+            <a:ext cx="640080" cy="365760"/>
+          </a:xfrm>
+          <a:prstGeom prst="rect">
+            <a:avLst/>
+          </a:prstGeom>
+          <a:noFill/>
+        </p:spPr>
+        <p:txBody>
+          <a:bodyPr wrap="square" anchor="t" lIns="0" rIns="0" tIns="0" bIns="0">
+            <a:spAutoFit/>
+          </a:bodyPr>
+          <a:lstStyle/>
+          <a:p>
+            <a:pPr algn="l">
+              <a:lnSpc>
+                <a:spcPct val="100000"/>
+              </a:lnSpc>
+              <a:spcBef>
+                <a:spcPts val="0"/>
+              </a:spcBef>
+              <a:spcAft>
+                <a:spcPts val="0"/>
+              </a:spcAft>
+            </a:pPr>
+            <a:r>
+              <a:rPr sz="1250" b="1">
+                <a:solidFill>
+                  <a:srgbClr val="0C6D8C"/>
+                </a:solidFill>
+                <a:latin typeface="맑은 고딕"/>
+                <a:ea typeface="맑은 고딕"/>
+              </a:rPr>
+              <a:t>KPI</a:t>
+            </a:r>
+          </a:p>
+        </p:txBody>
+      </p:sp>
+      <p:sp>
+        <p:nvSpPr>
+          <p:cNvPr id="32" name="TextBox 31"/>
+          <p:cNvSpPr txBox="1"/>
+          <p:nvPr/>
+        </p:nvSpPr>
+        <p:spPr>
+          <a:xfrm>
+            <a:off x="7104888" y="4306824"/>
+            <a:ext cx="4096512" cy="457200"/>
+          </a:xfrm>
+          <a:prstGeom prst="rect">
+            <a:avLst/>
+          </a:prstGeom>
+          <a:noFill/>
+        </p:spPr>
+        <p:txBody>
+          <a:bodyPr wrap="square" anchor="t" lIns="0" rIns="0" tIns="0" bIns="0">
+            <a:spAutoFit/>
+          </a:bodyPr>
+          <a:lstStyle/>
+          <a:p>
+            <a:pPr algn="l">
+              <a:lnSpc>
+                <a:spcPct val="112000"/>
+              </a:lnSpc>
+              <a:spcBef>
+                <a:spcPts val="0"/>
+              </a:spcBef>
+              <a:spcAft>
+                <a:spcPts val="0"/>
+              </a:spcAft>
+            </a:pPr>
+            <a:r>
+              <a:rPr sz="1450" b="1">
+                <a:solidFill>
+                  <a:srgbClr val="0C6D8C"/>
+                </a:solidFill>
+                <a:latin typeface="맑은 고딕"/>
+                <a:ea typeface="맑은 고딕"/>
+              </a:rPr>
+              <a:t>데이터 완결성(표준 충족률) · 재사용 건수</a:t>
+            </a:r>
+          </a:p>
+        </p:txBody>
+      </p:sp>
+      <p:sp>
+        <p:nvSpPr>
+          <p:cNvPr id="33" name="Rectangle 32"/>
           <p:cNvSpPr/>
           <p:nvPr/>
         </p:nvSpPr>
         <p:spPr>
           <a:xfrm>
-            <a:off x="6199632" y="4544568"/>
-            <a:ext cx="5221224" cy="521207"/>
+            <a:off x="6199632" y="4718304"/>
+            <a:ext cx="5221224" cy="457200"/>
           </a:xfrm>
           <a:prstGeom prst="rect">
             <a:avLst/>
           </a:prstGeom>
           <a:solidFill>
-            <a:srgbClr val="E7F4F9"/>
+            <a:srgbClr val="141A33"/>
           </a:solidFill>
           <a:ln>
             <a:noFill/>
@@ -18687,14 +18798,14 @@
       </p:sp>
       <p:sp>
         <p:nvSpPr>
-          <p:cNvPr id="30" name="TextBox 29"/>
+          <p:cNvPr id="34" name="TextBox 33"/>
           <p:cNvSpPr txBox="1"/>
           <p:nvPr/>
         </p:nvSpPr>
         <p:spPr>
           <a:xfrm>
-            <a:off x="6400800" y="4617720"/>
-            <a:ext cx="868680" cy="411480"/>
+            <a:off x="6400800" y="4782312"/>
+            <a:ext cx="640080" cy="365760"/>
           </a:xfrm>
           <a:prstGeom prst="rect">
             <a:avLst/>
@@ -18721,26 +18832,26 @@
             <a:r>
               <a:rPr sz="1250" b="1">
                 <a:solidFill>
-                  <a:srgbClr val="0C6D8C"/>
-                </a:solidFill>
-                <a:latin typeface="맑은 고딕"/>
-                <a:ea typeface="맑은 고딕"/>
-              </a:rPr>
-              <a:t>성공·중단</a:t>
-            </a:r>
-          </a:p>
-        </p:txBody>
-      </p:sp>
-      <p:sp>
-        <p:nvSpPr>
-          <p:cNvPr id="31" name="TextBox 30"/>
+                  <a:srgbClr val="5FD0EE"/>
+                </a:solidFill>
+                <a:latin typeface="맑은 고딕"/>
+                <a:ea typeface="맑은 고딕"/>
+              </a:rPr>
+              <a:t>판단</a:t>
+            </a:r>
+          </a:p>
+        </p:txBody>
+      </p:sp>
+      <p:sp>
+        <p:nvSpPr>
+          <p:cNvPr id="35" name="TextBox 34"/>
           <p:cNvSpPr txBox="1"/>
           <p:nvPr/>
         </p:nvSpPr>
         <p:spPr>
           <a:xfrm>
-            <a:off x="7333488" y="4608576"/>
-            <a:ext cx="3913632" cy="457200"/>
+            <a:off x="7104888" y="4773168"/>
+            <a:ext cx="4142232" cy="384048"/>
           </a:xfrm>
           <a:prstGeom prst="rect">
             <a:avLst/>
@@ -18755,41 +18866,41 @@
           <a:p>
             <a:pPr algn="l">
               <a:lnSpc>
-                <a:spcPct val="120000"/>
-              </a:lnSpc>
-              <a:spcBef>
-                <a:spcPts val="0"/>
-              </a:spcBef>
-              <a:spcAft>
-                <a:spcPts val="0"/>
-              </a:spcAft>
-            </a:pPr>
+                <a:spcPct val="110000"/>
+              </a:lnSpc>
+              <a:spcBef>
+                <a:spcPts val="0"/>
+              </a:spcBef>
+              <a:spcAft>
+                <a:spcPts val="0"/>
+              </a:spcAft>
+            </a:pPr>
+            <a:r>
+              <a:rPr sz="1350" b="0">
+                <a:solidFill>
+                  <a:srgbClr val="FFFFFF"/>
+                </a:solidFill>
+                <a:latin typeface="맑은 고딕"/>
+                <a:ea typeface="맑은 고딕"/>
+              </a:rPr>
+              <a:t>완결성·재사용 확인 + 동의·보안·규제 통과 → </a:t>
+            </a:r>
             <a:r>
               <a:rPr sz="1350" b="1">
                 <a:solidFill>
-                  <a:srgbClr val="0C6D8C"/>
-                </a:solidFill>
-                <a:latin typeface="맑은 고딕"/>
-                <a:ea typeface="맑은 고딕"/>
-              </a:rPr>
-              <a:t>데이터 완결성·재사용 가능성 확인 + 동의·보안·규제 통과</a:t>
-            </a:r>
-            <a:r>
-              <a:rPr sz="1350" b="0">
-                <a:solidFill>
-                  <a:srgbClr val="171A2E"/>
-                </a:solidFill>
-                <a:latin typeface="맑은 고딕"/>
-                <a:ea typeface="맑은 고딕"/>
-              </a:rPr>
-              <a:t> → 확대 / 미달 → 표준 범위 재조정</a:t>
-            </a:r>
-          </a:p>
-        </p:txBody>
-      </p:sp>
-      <p:sp>
-        <p:nvSpPr>
-          <p:cNvPr id="32" name="Rounded Rectangle 31"/>
+                  <a:srgbClr val="5FD0EE"/>
+                </a:solidFill>
+                <a:latin typeface="맑은 고딕"/>
+                <a:ea typeface="맑은 고딕"/>
+              </a:rPr>
+              <a:t>확대</a:t>
+            </a:r>
+          </a:p>
+        </p:txBody>
+      </p:sp>
+      <p:sp>
+        <p:nvSpPr>
+          <p:cNvPr id="36" name="Rounded Rectangle 35"/>
           <p:cNvSpPr/>
           <p:nvPr/>
         </p:nvSpPr>
@@ -18862,7 +18973,7 @@
                 <a:latin typeface="맑은 고딕"/>
                 <a:ea typeface="맑은 고딕"/>
               </a:rPr>
-              <a:t>입니다. 데이터는 </a:t>
+              <a:t>입니다. </a:t>
             </a:r>
             <a:r>
               <a:rPr sz="1350" b="1">
@@ -18872,7 +18983,7 @@
                 <a:latin typeface="맑은 고딕"/>
                 <a:ea typeface="맑은 고딕"/>
               </a:rPr>
-              <a:t>환자 동의와 보안·규제 범위 안에서만</a:t>
+              <a:t>KPI 목표치는 입사 후 합의</a:t>
             </a:r>
             <a:r>
               <a:rPr sz="1350" b="0">
@@ -18882,14 +18993,14 @@
                 <a:latin typeface="맑은 고딕"/>
                 <a:ea typeface="맑은 고딕"/>
               </a:rPr>
-              <a:t> 씁니다.</a:t>
-            </a:r>
-          </a:p>
-        </p:txBody>
-      </p:sp>
-      <p:sp>
-        <p:nvSpPr>
-          <p:cNvPr id="33" name="Rectangle 32"/>
+              <a:t>하며, 데이터는 환자 동의·보안·규제 범위 안에서만 씁니다.</a:t>
+            </a:r>
+          </a:p>
+        </p:txBody>
+      </p:sp>
+      <p:sp>
+        <p:nvSpPr>
+          <p:cNvPr id="37" name="Rectangle 36"/>
           <p:cNvSpPr/>
           <p:nvPr/>
         </p:nvSpPr>
@@ -18933,7 +19044,7 @@
       </p:sp>
       <p:sp>
         <p:nvSpPr>
-          <p:cNvPr id="34" name="TextBox 33"/>
+          <p:cNvPr id="38" name="TextBox 37"/>
           <p:cNvSpPr txBox="1"/>
           <p:nvPr/>
         </p:nvSpPr>
@@ -18979,7 +19090,7 @@
       </p:sp>
       <p:sp>
         <p:nvSpPr>
-          <p:cNvPr id="35" name="TextBox 34"/>
+          <p:cNvPr id="39" name="TextBox 38"/>
           <p:cNvSpPr txBox="1"/>
           <p:nvPr/>
         </p:nvSpPr>

--- a/정치성_DAI_AI헬스케어플랫폼팀장_면접PT.pptx
+++ b/정치성_DAI_AI헬스케어플랫폼팀장_면접PT.pptx
@@ -3228,7 +3228,7 @@
                 <a:latin typeface="맑은 고딕"/>
                 <a:ea typeface="맑은 고딕"/>
               </a:rPr>
-              <a:t>INTERVIEW PRESENTATION</a:t>
+              <a:t>면접 발표</a:t>
             </a:r>
           </a:p>
         </p:txBody>
@@ -3763,7 +3763,7 @@
                 <a:latin typeface="맑은 고딕"/>
                 <a:ea typeface="맑은 고딕"/>
               </a:rPr>
-              <a:t>CLOSING</a:t>
+              <a:t>맺음말</a:t>
             </a:r>
           </a:p>
         </p:txBody>
@@ -3892,7 +3892,7 @@
         <p:spPr>
           <a:xfrm>
             <a:off x="713232" y="3977639"/>
-            <a:ext cx="3200400" cy="320040"/>
+            <a:ext cx="2468880" cy="320040"/>
           </a:xfrm>
           <a:prstGeom prst="rect">
             <a:avLst/>
@@ -3917,7 +3917,7 @@
               </a:spcAft>
             </a:pPr>
             <a:r>
-              <a:rPr sz="1300" b="1" spc="50">
+              <a:rPr sz="1250" b="1" spc="40">
                 <a:solidFill>
                   <a:srgbClr val="5FD0EE"/>
                 </a:solidFill>
@@ -3938,7 +3938,7 @@
         <p:spPr>
           <a:xfrm>
             <a:off x="713232" y="4343400"/>
-            <a:ext cx="3291840" cy="822960"/>
+            <a:ext cx="2514600" cy="1051560"/>
           </a:xfrm>
           <a:prstGeom prst="rect">
             <a:avLst/>
@@ -3953,24 +3953,24 @@
           <a:p>
             <a:pPr algn="l">
               <a:lnSpc>
-                <a:spcPct val="130000"/>
-              </a:lnSpc>
-              <a:spcBef>
-                <a:spcPts val="0"/>
-              </a:spcBef>
-              <a:spcAft>
-                <a:spcPts val="0"/>
-              </a:spcAft>
-            </a:pPr>
-            <a:r>
-              <a:rPr sz="1700" b="1">
+                <a:spcPct val="128000"/>
+              </a:lnSpc>
+              <a:spcBef>
+                <a:spcPts val="0"/>
+              </a:spcBef>
+              <a:spcAft>
+                <a:spcPts val="0"/>
+              </a:spcAft>
+            </a:pPr>
+            <a:r>
+              <a:rPr sz="1500" b="1">
                 <a:solidFill>
                   <a:srgbClr val="E7EBF6"/>
                 </a:solidFill>
                 <a:latin typeface="맑은 고딕"/>
                 <a:ea typeface="맑은 고딕"/>
               </a:rPr>
-              <a:t>사용자 행동과 사업 전환을 함께 본 경험</a:t>
+              <a:t>사용자 행동과 사업 전환을 함께 봤습니다</a:t>
             </a:r>
           </a:p>
         </p:txBody>
@@ -3983,8 +3983,8 @@
         </p:nvCxnSpPr>
         <p:spPr>
           <a:xfrm>
-            <a:off x="4142232" y="3977639"/>
-            <a:ext cx="0" cy="868680"/>
+            <a:off x="3236976" y="3977639"/>
+            <a:ext cx="0" cy="1051560"/>
           </a:xfrm>
           <a:prstGeom prst="bentConnector3">
             <a:avLst/>
@@ -4019,8 +4019,8 @@
         </p:nvSpPr>
         <p:spPr>
           <a:xfrm>
-            <a:off x="4325112" y="3977639"/>
-            <a:ext cx="3200400" cy="320040"/>
+            <a:off x="3383280" y="3977639"/>
+            <a:ext cx="2468880" cy="320040"/>
           </a:xfrm>
           <a:prstGeom prst="rect">
             <a:avLst/>
@@ -4045,14 +4045,14 @@
               </a:spcAft>
             </a:pPr>
             <a:r>
-              <a:rPr sz="1300" b="1" spc="50">
+              <a:rPr sz="1250" b="1" spc="40">
                 <a:solidFill>
                   <a:srgbClr val="5FD0EE"/>
                 </a:solidFill>
                 <a:latin typeface="맑은 고딕"/>
                 <a:ea typeface="맑은 고딕"/>
               </a:rPr>
-              <a:t>02 · 연동</a:t>
+              <a:t>02 · 운영</a:t>
             </a:r>
           </a:p>
         </p:txBody>
@@ -4065,8 +4065,8 @@
         </p:nvSpPr>
         <p:spPr>
           <a:xfrm>
-            <a:off x="4325112" y="4343400"/>
-            <a:ext cx="3291840" cy="822960"/>
+            <a:off x="3383280" y="4343400"/>
+            <a:ext cx="2514600" cy="1051560"/>
           </a:xfrm>
           <a:prstGeom prst="rect">
             <a:avLst/>
@@ -4081,24 +4081,24 @@
           <a:p>
             <a:pPr algn="l">
               <a:lnSpc>
-                <a:spcPct val="130000"/>
-              </a:lnSpc>
-              <a:spcBef>
-                <a:spcPts val="0"/>
-              </a:spcBef>
-              <a:spcAft>
-                <a:spcPts val="0"/>
-              </a:spcAft>
-            </a:pPr>
-            <a:r>
-              <a:rPr sz="1700" b="1">
+                <a:spcPct val="128000"/>
+              </a:lnSpc>
+              <a:spcBef>
+                <a:spcPts val="0"/>
+              </a:spcBef>
+              <a:spcAft>
+                <a:spcPts val="0"/>
+              </a:spcAft>
+            </a:pPr>
+            <a:r>
+              <a:rPr sz="1500" b="1">
                 <a:solidFill>
                   <a:srgbClr val="E7EBF6"/>
                 </a:solidFill>
                 <a:latin typeface="맑은 고딕"/>
                 <a:ea typeface="맑은 고딕"/>
               </a:rPr>
-              <a:t>현장 업무와 외부 시스템을 연결한 경험</a:t>
+              <a:t>현장 처리 업무를 시스템으로 구조화했습니다</a:t>
             </a:r>
           </a:p>
         </p:txBody>
@@ -4111,8 +4111,8 @@
         </p:nvCxnSpPr>
         <p:spPr>
           <a:xfrm>
-            <a:off x="7754112" y="3977639"/>
-            <a:ext cx="0" cy="868680"/>
+            <a:off x="5907024" y="3977639"/>
+            <a:ext cx="0" cy="1051560"/>
           </a:xfrm>
           <a:prstGeom prst="bentConnector3">
             <a:avLst/>
@@ -4147,8 +4147,8 @@
         </p:nvSpPr>
         <p:spPr>
           <a:xfrm>
-            <a:off x="7936992" y="3977639"/>
-            <a:ext cx="3200400" cy="320040"/>
+            <a:off x="6053328" y="3977639"/>
+            <a:ext cx="2468880" cy="320040"/>
           </a:xfrm>
           <a:prstGeom prst="rect">
             <a:avLst/>
@@ -4173,14 +4173,14 @@
               </a:spcAft>
             </a:pPr>
             <a:r>
-              <a:rPr sz="1300" b="1" spc="50">
+              <a:rPr sz="1250" b="1" spc="40">
                 <a:solidFill>
                   <a:srgbClr val="5FD0EE"/>
                 </a:solidFill>
                 <a:latin typeface="맑은 고딕"/>
                 <a:ea typeface="맑은 고딕"/>
               </a:rPr>
-              <a:t>03 · 실행</a:t>
+              <a:t>03 · 연동</a:t>
             </a:r>
           </a:p>
         </p:txBody>
@@ -4193,8 +4193,8 @@
         </p:nvSpPr>
         <p:spPr>
           <a:xfrm>
-            <a:off x="7936992" y="4343400"/>
-            <a:ext cx="3291840" cy="822960"/>
+            <a:off x="6053328" y="4343400"/>
+            <a:ext cx="2514600" cy="1051560"/>
           </a:xfrm>
           <a:prstGeom prst="rect">
             <a:avLst/>
@@ -4209,31 +4209,159 @@
           <a:p>
             <a:pPr algn="l">
               <a:lnSpc>
-                <a:spcPct val="130000"/>
-              </a:lnSpc>
-              <a:spcBef>
-                <a:spcPts val="0"/>
-              </a:spcBef>
-              <a:spcAft>
-                <a:spcPts val="0"/>
-              </a:spcAft>
-            </a:pPr>
-            <a:r>
-              <a:rPr sz="1700" b="1">
+                <a:spcPct val="128000"/>
+              </a:lnSpc>
+              <a:spcBef>
+                <a:spcPts val="0"/>
+              </a:spcBef>
+              <a:spcAft>
+                <a:spcPts val="0"/>
+              </a:spcAft>
+            </a:pPr>
+            <a:r>
+              <a:rPr sz="1500" b="1">
                 <a:solidFill>
                   <a:srgbClr val="E7EBF6"/>
                 </a:solidFill>
                 <a:latin typeface="맑은 고딕"/>
                 <a:ea typeface="맑은 고딕"/>
               </a:rPr>
-              <a:t>우선순위를 정하고 여러 팀의 실행을 이끈 경험</a:t>
-            </a:r>
-          </a:p>
-        </p:txBody>
-      </p:sp>
-      <p:sp>
-        <p:nvSpPr>
-          <p:cNvPr id="15" name="TextBox 14"/>
+              <a:t>현장 업무와 외부 시스템을 연결했습니다</a:t>
+            </a:r>
+          </a:p>
+        </p:txBody>
+      </p:sp>
+      <p:cxnSp>
+        <p:nvCxnSpPr>
+          <p:cNvPr id="15" name="Connector 14"/>
+          <p:cNvCxnSpPr/>
+          <p:nvPr/>
+        </p:nvCxnSpPr>
+        <p:spPr>
+          <a:xfrm>
+            <a:off x="8577072" y="3977639"/>
+            <a:ext cx="0" cy="1051560"/>
+          </a:xfrm>
+          <a:prstGeom prst="bentConnector3">
+            <a:avLst/>
+          </a:prstGeom>
+          <a:ln w="12700">
+            <a:solidFill>
+              <a:srgbClr val="333B5E"/>
+            </a:solidFill>
+          </a:ln>
+          <a:effectLst/>
+        </p:spPr>
+        <p:style>
+          <a:lnRef idx="2">
+            <a:schemeClr val="accent1"/>
+          </a:lnRef>
+          <a:fillRef idx="0">
+            <a:schemeClr val="accent1"/>
+          </a:fillRef>
+          <a:effectRef idx="1">
+            <a:schemeClr val="accent1"/>
+          </a:effectRef>
+          <a:fontRef idx="minor">
+            <a:schemeClr val="tx1"/>
+          </a:fontRef>
+        </p:style>
+      </p:cxnSp>
+      <p:sp>
+        <p:nvSpPr>
+          <p:cNvPr id="16" name="TextBox 15"/>
+          <p:cNvSpPr txBox="1"/>
+          <p:nvPr/>
+        </p:nvSpPr>
+        <p:spPr>
+          <a:xfrm>
+            <a:off x="8723376" y="3977639"/>
+            <a:ext cx="2468880" cy="320040"/>
+          </a:xfrm>
+          <a:prstGeom prst="rect">
+            <a:avLst/>
+          </a:prstGeom>
+          <a:noFill/>
+        </p:spPr>
+        <p:txBody>
+          <a:bodyPr wrap="square" anchor="t" lIns="0" rIns="0" tIns="0" bIns="0">
+            <a:spAutoFit/>
+          </a:bodyPr>
+          <a:lstStyle/>
+          <a:p>
+            <a:pPr algn="l">
+              <a:lnSpc>
+                <a:spcPct val="100000"/>
+              </a:lnSpc>
+              <a:spcBef>
+                <a:spcPts val="0"/>
+              </a:spcBef>
+              <a:spcAft>
+                <a:spcPts val="0"/>
+              </a:spcAft>
+            </a:pPr>
+            <a:r>
+              <a:rPr sz="1250" b="1" spc="40">
+                <a:solidFill>
+                  <a:srgbClr val="5FD0EE"/>
+                </a:solidFill>
+                <a:latin typeface="맑은 고딕"/>
+                <a:ea typeface="맑은 고딕"/>
+              </a:rPr>
+              <a:t>04 · 실행</a:t>
+            </a:r>
+          </a:p>
+        </p:txBody>
+      </p:sp>
+      <p:sp>
+        <p:nvSpPr>
+          <p:cNvPr id="17" name="TextBox 16"/>
+          <p:cNvSpPr txBox="1"/>
+          <p:nvPr/>
+        </p:nvSpPr>
+        <p:spPr>
+          <a:xfrm>
+            <a:off x="8723376" y="4343400"/>
+            <a:ext cx="2514600" cy="1051560"/>
+          </a:xfrm>
+          <a:prstGeom prst="rect">
+            <a:avLst/>
+          </a:prstGeom>
+          <a:noFill/>
+        </p:spPr>
+        <p:txBody>
+          <a:bodyPr wrap="square" anchor="t" lIns="0" rIns="0" tIns="0" bIns="0">
+            <a:spAutoFit/>
+          </a:bodyPr>
+          <a:lstStyle/>
+          <a:p>
+            <a:pPr algn="l">
+              <a:lnSpc>
+                <a:spcPct val="128000"/>
+              </a:lnSpc>
+              <a:spcBef>
+                <a:spcPts val="0"/>
+              </a:spcBef>
+              <a:spcAft>
+                <a:spcPts val="0"/>
+              </a:spcAft>
+            </a:pPr>
+            <a:r>
+              <a:rPr sz="1500" b="1">
+                <a:solidFill>
+                  <a:srgbClr val="E7EBF6"/>
+                </a:solidFill>
+                <a:latin typeface="맑은 고딕"/>
+                <a:ea typeface="맑은 고딕"/>
+              </a:rPr>
+              <a:t>우선순위를 정하고 여러 팀의 실행을 이끌었습니다</a:t>
+            </a:r>
+          </a:p>
+        </p:txBody>
+      </p:sp>
+      <p:sp>
+        <p:nvSpPr>
+          <p:cNvPr id="18" name="TextBox 17"/>
           <p:cNvSpPr txBox="1"/>
           <p:nvPr/>
         </p:nvSpPr>
@@ -4299,7 +4427,7 @@
       </p:sp>
       <p:sp>
         <p:nvSpPr>
-          <p:cNvPr id="16" name="TextBox 15"/>
+          <p:cNvPr id="19" name="TextBox 18"/>
           <p:cNvSpPr txBox="1"/>
           <p:nvPr/>
         </p:nvSpPr>
@@ -4345,7 +4473,7 @@
       </p:sp>
       <p:sp>
         <p:nvSpPr>
-          <p:cNvPr id="17" name="TextBox 16"/>
+          <p:cNvPr id="20" name="TextBox 19"/>
           <p:cNvSpPr txBox="1"/>
           <p:nvPr/>
         </p:nvSpPr>
@@ -6530,7 +6658,7 @@
                 <a:latin typeface="맑은 고딕"/>
                 <a:ea typeface="맑은 고딕"/>
               </a:rPr>
-              <a:t>의 상담신청 전환율, 수정 전 대비 개선</a:t>
+              <a:t/>
             </a:r>
           </a:p>
         </p:txBody>
@@ -7742,14 +7870,14 @@
               </a:spcAft>
             </a:pPr>
             <a:r>
-              <a:rPr sz="1300" b="1">
+              <a:rPr sz="1500" b="1">
                 <a:solidFill>
                   <a:srgbClr val="0C6D8C"/>
                 </a:solidFill>
                 <a:latin typeface="맑은 고딕"/>
                 <a:ea typeface="맑은 고딕"/>
               </a:rPr>
-              <a:t>전환율 ▲ 20% 개선</a:t>
+              <a:t>▲ 20%</a:t>
             </a:r>
           </a:p>
         </p:txBody>
@@ -17838,7 +17966,7 @@
                 <a:latin typeface="맑은 고딕"/>
                 <a:ea typeface="맑은 고딕"/>
               </a:rPr>
-              <a:t>그룹은 진단·모니터링·관리 접점을 이미 보유(닥터눈·하이카디·케어센스에어)</a:t>
+              <a:t>그룹이 유통·판매하는 진단·모니터링·관리 접점(닥터눈·하이카디·케어센스에어)</a:t>
             </a:r>
           </a:p>
         </p:txBody>
@@ -17930,7 +18058,7 @@
                 <a:latin typeface="맑은 고딕"/>
                 <a:ea typeface="맑은 고딕"/>
               </a:rPr>
-              <a:t>만성질환자 일부에게 </a:t>
+              <a:t>동의·규제 확보를 전제로, 만성질환자 일부에게 </a:t>
             </a:r>
             <a:r>
               <a:rPr sz="1450" b="1">
@@ -18032,7 +18160,7 @@
                 <a:latin typeface="맑은 고딕"/>
                 <a:ea typeface="맑은 고딕"/>
               </a:rPr>
-              <a:t>측정 지속률 · 다음 행동 연결률 · 안전 인시던트 0</a:t>
+              <a:t>측정 지속률 · 다음 행동 연결률 · 안전 인시던트(발생 여부·건수)</a:t>
             </a:r>
           </a:p>
         </p:txBody>
@@ -18326,7 +18454,7 @@
                 <a:latin typeface="맑은 고딕"/>
                 <a:ea typeface="맑은 고딕"/>
               </a:rPr>
-              <a:t>가설 B · 데이터 플라이휠(RWD)</a:t>
+              <a:t>가설 B · 데이터 재사용(RWD)</a:t>
             </a:r>
           </a:p>
           <a:p>
